--- a/nwec/utility_reporting/analysis/200281 Analysis Template.pptx
+++ b/nwec/utility_reporting/analysis/200281 Analysis Template.pptx
@@ -155,7 +155,7 @@
       </p:grpSpPr>
       <p:sp>
         <p:nvSpPr>
-          <p:cNvPr id="61568798" name="Header Placeholder 1"/>
+          <p:cNvPr id="1538511197" name="Header Placeholder 1"/>
           <p:cNvSpPr>
             <a:spLocks noGrp="1"/>
           </p:cNvSpPr>
@@ -189,7 +189,7 @@
       </p:sp>
       <p:sp>
         <p:nvSpPr>
-          <p:cNvPr id="75398653" name="Date Placeholder 2"/>
+          <p:cNvPr id="1976295666" name="Date Placeholder 2"/>
           <p:cNvSpPr>
             <a:spLocks noGrp="1"/>
           </p:cNvSpPr>
@@ -227,7 +227,7 @@
       </p:sp>
       <p:sp>
         <p:nvSpPr>
-          <p:cNvPr id="27517480" name="Slide Image Placeholder 3"/>
+          <p:cNvPr id="1221968434" name="Slide Image Placeholder 3"/>
           <p:cNvSpPr>
             <a:spLocks noChangeAspect="1" noGrp="1" noRot="1"/>
           </p:cNvSpPr>
@@ -263,7 +263,7 @@
       </p:sp>
       <p:sp>
         <p:nvSpPr>
-          <p:cNvPr id="1790485375" name="Notes Placeholder 4"/>
+          <p:cNvPr id="847937455" name="Notes Placeholder 4"/>
           <p:cNvSpPr>
             <a:spLocks noGrp="1"/>
           </p:cNvSpPr>
@@ -337,7 +337,7 @@
       </p:sp>
       <p:sp>
         <p:nvSpPr>
-          <p:cNvPr id="1888205877" name="Footer Placeholder 5"/>
+          <p:cNvPr id="206161853" name="Footer Placeholder 5"/>
           <p:cNvSpPr>
             <a:spLocks noGrp="1"/>
           </p:cNvSpPr>
@@ -371,7 +371,7 @@
       </p:sp>
       <p:sp>
         <p:nvSpPr>
-          <p:cNvPr id="847467478" name="Slide Number Placeholder 6"/>
+          <p:cNvPr id="868076247" name="Slide Number Placeholder 6"/>
           <p:cNvSpPr>
             <a:spLocks noGrp="1"/>
           </p:cNvSpPr>
@@ -524,7 +524,7 @@
       </p:grpSpPr>
       <p:sp>
         <p:nvSpPr>
-          <p:cNvPr id="2" name="Slide Image Placeholder 1"/>
+          <p:cNvPr id="1799155406" name="Slide Image Placeholder 1"/>
           <p:cNvSpPr>
             <a:spLocks noChangeAspect="1" noGrp="1" noRot="1"/>
           </p:cNvSpPr>
@@ -536,7 +536,7 @@
       </p:sp>
       <p:sp>
         <p:nvSpPr>
-          <p:cNvPr id="3" name="Notes Placeholder 2"/>
+          <p:cNvPr id="1988593365" name="Notes Placeholder 2"/>
           <p:cNvSpPr>
             <a:spLocks noGrp="1"/>
           </p:cNvSpPr>
@@ -558,7 +558,7 @@
       </p:sp>
       <p:sp>
         <p:nvSpPr>
-          <p:cNvPr id="4" name="Slide Number Placeholder 3"/>
+          <p:cNvPr id="32916324" name="Slide Number Placeholder 3"/>
           <p:cNvSpPr>
             <a:spLocks noGrp="1"/>
           </p:cNvSpPr>
@@ -609,7 +609,7 @@
       </p:grpSpPr>
       <p:sp>
         <p:nvSpPr>
-          <p:cNvPr id="2" name="Slide Image Placeholder 1"/>
+          <p:cNvPr id="1244372682" name="Slide Image Placeholder 1"/>
           <p:cNvSpPr>
             <a:spLocks noChangeAspect="1" noGrp="1" noRot="1"/>
           </p:cNvSpPr>
@@ -621,7 +621,7 @@
       </p:sp>
       <p:sp>
         <p:nvSpPr>
-          <p:cNvPr id="3" name="Notes Placeholder 2"/>
+          <p:cNvPr id="265296273" name="Notes Placeholder 2"/>
           <p:cNvSpPr>
             <a:spLocks noGrp="1"/>
           </p:cNvSpPr>
@@ -643,7 +643,7 @@
       </p:sp>
       <p:sp>
         <p:nvSpPr>
-          <p:cNvPr id="4" name="Slide Number Placeholder 3"/>
+          <p:cNvPr id="1009959004" name="Slide Number Placeholder 3"/>
           <p:cNvSpPr>
             <a:spLocks noGrp="1"/>
           </p:cNvSpPr>
@@ -694,7 +694,7 @@
       </p:grpSpPr>
       <p:sp>
         <p:nvSpPr>
-          <p:cNvPr id="2" name="Slide Image Placeholder 1"/>
+          <p:cNvPr id="901729273" name="Slide Image Placeholder 1"/>
           <p:cNvSpPr>
             <a:spLocks noChangeAspect="1" noGrp="1" noRot="1"/>
           </p:cNvSpPr>
@@ -706,7 +706,7 @@
       </p:sp>
       <p:sp>
         <p:nvSpPr>
-          <p:cNvPr id="3" name="Notes Placeholder 2"/>
+          <p:cNvPr id="2110178473" name="Notes Placeholder 2"/>
           <p:cNvSpPr>
             <a:spLocks noGrp="1"/>
           </p:cNvSpPr>
@@ -728,7 +728,7 @@
       </p:sp>
       <p:sp>
         <p:nvSpPr>
-          <p:cNvPr id="4" name="Slide Number Placeholder 3"/>
+          <p:cNvPr id="1359524077" name="Slide Number Placeholder 3"/>
           <p:cNvSpPr>
             <a:spLocks noGrp="1"/>
           </p:cNvSpPr>
@@ -779,7 +779,7 @@
       </p:grpSpPr>
       <p:sp>
         <p:nvSpPr>
-          <p:cNvPr id="2" name="Slide Image Placeholder 1"/>
+          <p:cNvPr id="792367905" name="Slide Image Placeholder 1"/>
           <p:cNvSpPr>
             <a:spLocks noChangeAspect="1" noGrp="1" noRot="1"/>
           </p:cNvSpPr>
@@ -791,7 +791,7 @@
       </p:sp>
       <p:sp>
         <p:nvSpPr>
-          <p:cNvPr id="3" name="Notes Placeholder 2"/>
+          <p:cNvPr id="588882203" name="Notes Placeholder 2"/>
           <p:cNvSpPr>
             <a:spLocks noGrp="1"/>
           </p:cNvSpPr>
@@ -813,7 +813,7 @@
       </p:sp>
       <p:sp>
         <p:nvSpPr>
-          <p:cNvPr id="4" name="Slide Number Placeholder 3"/>
+          <p:cNvPr id="747493064" name="Slide Number Placeholder 3"/>
           <p:cNvSpPr>
             <a:spLocks noGrp="1"/>
           </p:cNvSpPr>
@@ -864,7 +864,7 @@
       </p:grpSpPr>
       <p:sp>
         <p:nvSpPr>
-          <p:cNvPr id="2" name="Slide Image Placeholder 1"/>
+          <p:cNvPr id="1867432478" name="Slide Image Placeholder 1"/>
           <p:cNvSpPr>
             <a:spLocks noChangeAspect="1" noGrp="1" noRot="1"/>
           </p:cNvSpPr>
@@ -876,7 +876,7 @@
       </p:sp>
       <p:sp>
         <p:nvSpPr>
-          <p:cNvPr id="3" name="Notes Placeholder 2"/>
+          <p:cNvPr id="1724583105" name="Notes Placeholder 2"/>
           <p:cNvSpPr>
             <a:spLocks noGrp="1"/>
           </p:cNvSpPr>
@@ -898,7 +898,7 @@
       </p:sp>
       <p:sp>
         <p:nvSpPr>
-          <p:cNvPr id="4" name="Slide Number Placeholder 3"/>
+          <p:cNvPr id="236354961" name="Slide Number Placeholder 3"/>
           <p:cNvSpPr>
             <a:spLocks noGrp="1"/>
           </p:cNvSpPr>
@@ -949,7 +949,7 @@
       </p:grpSpPr>
       <p:sp>
         <p:nvSpPr>
-          <p:cNvPr id="2" name="Slide Image Placeholder 1"/>
+          <p:cNvPr id="655042693" name="Slide Image Placeholder 1"/>
           <p:cNvSpPr>
             <a:spLocks noChangeAspect="1" noGrp="1" noRot="1"/>
           </p:cNvSpPr>
@@ -961,7 +961,7 @@
       </p:sp>
       <p:sp>
         <p:nvSpPr>
-          <p:cNvPr id="3" name="Notes Placeholder 2"/>
+          <p:cNvPr id="573093426" name="Notes Placeholder 2"/>
           <p:cNvSpPr>
             <a:spLocks noGrp="1"/>
           </p:cNvSpPr>
@@ -983,7 +983,7 @@
       </p:sp>
       <p:sp>
         <p:nvSpPr>
-          <p:cNvPr id="4" name="Slide Number Placeholder 3"/>
+          <p:cNvPr id="1216578362" name="Slide Number Placeholder 3"/>
           <p:cNvSpPr>
             <a:spLocks noGrp="1"/>
           </p:cNvSpPr>
@@ -1034,7 +1034,7 @@
       </p:grpSpPr>
       <p:sp>
         <p:nvSpPr>
-          <p:cNvPr id="2" name="Slide Image Placeholder 1"/>
+          <p:cNvPr id="1820774878" name="Slide Image Placeholder 1"/>
           <p:cNvSpPr>
             <a:spLocks noChangeAspect="1" noGrp="1" noRot="1"/>
           </p:cNvSpPr>
@@ -1046,7 +1046,7 @@
       </p:sp>
       <p:sp>
         <p:nvSpPr>
-          <p:cNvPr id="3" name="Notes Placeholder 2"/>
+          <p:cNvPr id="1308738165" name="Notes Placeholder 2"/>
           <p:cNvSpPr>
             <a:spLocks noGrp="1"/>
           </p:cNvSpPr>
@@ -1068,7 +1068,7 @@
       </p:sp>
       <p:sp>
         <p:nvSpPr>
-          <p:cNvPr id="4" name="Slide Number Placeholder 3"/>
+          <p:cNvPr id="1099162617" name="Slide Number Placeholder 3"/>
           <p:cNvSpPr>
             <a:spLocks noGrp="1"/>
           </p:cNvSpPr>
@@ -1119,7 +1119,7 @@
       </p:grpSpPr>
       <p:sp>
         <p:nvSpPr>
-          <p:cNvPr id="2" name="Slide Image Placeholder 1"/>
+          <p:cNvPr id="519053202" name="Slide Image Placeholder 1"/>
           <p:cNvSpPr>
             <a:spLocks noChangeAspect="1" noGrp="1" noRot="1"/>
           </p:cNvSpPr>
@@ -1131,7 +1131,7 @@
       </p:sp>
       <p:sp>
         <p:nvSpPr>
-          <p:cNvPr id="3" name="Notes Placeholder 2"/>
+          <p:cNvPr id="227002143" name="Notes Placeholder 2"/>
           <p:cNvSpPr>
             <a:spLocks noGrp="1"/>
           </p:cNvSpPr>
@@ -1153,7 +1153,7 @@
       </p:sp>
       <p:sp>
         <p:nvSpPr>
-          <p:cNvPr id="4" name="Slide Number Placeholder 3"/>
+          <p:cNvPr id="1491340350" name="Slide Number Placeholder 3"/>
           <p:cNvSpPr>
             <a:spLocks noGrp="1"/>
           </p:cNvSpPr>
@@ -1204,7 +1204,7 @@
       </p:grpSpPr>
       <p:sp>
         <p:nvSpPr>
-          <p:cNvPr id="2" name="Slide Image Placeholder 1"/>
+          <p:cNvPr id="647076843" name="Slide Image Placeholder 1"/>
           <p:cNvSpPr>
             <a:spLocks noChangeAspect="1" noGrp="1" noRot="1"/>
           </p:cNvSpPr>
@@ -1216,7 +1216,7 @@
       </p:sp>
       <p:sp>
         <p:nvSpPr>
-          <p:cNvPr id="3" name="Notes Placeholder 2"/>
+          <p:cNvPr id="850751257" name="Notes Placeholder 2"/>
           <p:cNvSpPr>
             <a:spLocks noGrp="1"/>
           </p:cNvSpPr>
@@ -1238,7 +1238,7 @@
       </p:sp>
       <p:sp>
         <p:nvSpPr>
-          <p:cNvPr id="4" name="Slide Number Placeholder 3"/>
+          <p:cNvPr id="359712440" name="Slide Number Placeholder 3"/>
           <p:cNvSpPr>
             <a:spLocks noGrp="1"/>
           </p:cNvSpPr>
@@ -1289,7 +1289,7 @@
       </p:grpSpPr>
       <p:sp>
         <p:nvSpPr>
-          <p:cNvPr id="2" name="Slide Image Placeholder 1"/>
+          <p:cNvPr id="353515136" name="Slide Image Placeholder 1"/>
           <p:cNvSpPr>
             <a:spLocks noChangeAspect="1" noGrp="1" noRot="1"/>
           </p:cNvSpPr>
@@ -1301,7 +1301,7 @@
       </p:sp>
       <p:sp>
         <p:nvSpPr>
-          <p:cNvPr id="3" name="Notes Placeholder 2"/>
+          <p:cNvPr id="2057092578" name="Notes Placeholder 2"/>
           <p:cNvSpPr>
             <a:spLocks noGrp="1"/>
           </p:cNvSpPr>
@@ -1323,7 +1323,7 @@
       </p:sp>
       <p:sp>
         <p:nvSpPr>
-          <p:cNvPr id="4" name="Slide Number Placeholder 3"/>
+          <p:cNvPr id="1295500071" name="Slide Number Placeholder 3"/>
           <p:cNvSpPr>
             <a:spLocks noGrp="1"/>
           </p:cNvSpPr>
@@ -1374,7 +1374,7 @@
       </p:grpSpPr>
       <p:sp>
         <p:nvSpPr>
-          <p:cNvPr id="2" name="Slide Image Placeholder 1"/>
+          <p:cNvPr id="430639699" name="Slide Image Placeholder 1"/>
           <p:cNvSpPr>
             <a:spLocks noChangeAspect="1" noGrp="1" noRot="1"/>
           </p:cNvSpPr>
@@ -1386,7 +1386,7 @@
       </p:sp>
       <p:sp>
         <p:nvSpPr>
-          <p:cNvPr id="3" name="Notes Placeholder 2"/>
+          <p:cNvPr id="1535580586" name="Notes Placeholder 2"/>
           <p:cNvSpPr>
             <a:spLocks noGrp="1"/>
           </p:cNvSpPr>
@@ -1408,7 +1408,7 @@
       </p:sp>
       <p:sp>
         <p:nvSpPr>
-          <p:cNvPr id="4" name="Slide Number Placeholder 3"/>
+          <p:cNvPr id="2110438723" name="Slide Number Placeholder 3"/>
           <p:cNvSpPr>
             <a:spLocks noGrp="1"/>
           </p:cNvSpPr>
@@ -1459,7 +1459,7 @@
       </p:grpSpPr>
       <p:sp>
         <p:nvSpPr>
-          <p:cNvPr id="2" name="Slide Image Placeholder 1"/>
+          <p:cNvPr id="1792950552" name="Slide Image Placeholder 1"/>
           <p:cNvSpPr>
             <a:spLocks noChangeAspect="1" noGrp="1" noRot="1"/>
           </p:cNvSpPr>
@@ -1471,7 +1471,7 @@
       </p:sp>
       <p:sp>
         <p:nvSpPr>
-          <p:cNvPr id="3" name="Notes Placeholder 2"/>
+          <p:cNvPr id="759503273" name="Notes Placeholder 2"/>
           <p:cNvSpPr>
             <a:spLocks noGrp="1"/>
           </p:cNvSpPr>
@@ -1493,7 +1493,7 @@
       </p:sp>
       <p:sp>
         <p:nvSpPr>
-          <p:cNvPr id="4" name="Slide Number Placeholder 3"/>
+          <p:cNvPr id="854415086" name="Slide Number Placeholder 3"/>
           <p:cNvSpPr>
             <a:spLocks noGrp="1"/>
           </p:cNvSpPr>
@@ -1544,7 +1544,7 @@
       </p:grpSpPr>
       <p:sp>
         <p:nvSpPr>
-          <p:cNvPr id="2045710364" name="Slide Image Placeholder 1"/>
+          <p:cNvPr id="460514414" name="Slide Image Placeholder 1"/>
           <p:cNvSpPr>
             <a:spLocks noChangeAspect="1" noGrp="1" noRot="1"/>
           </p:cNvSpPr>
@@ -1556,7 +1556,7 @@
       </p:sp>
       <p:sp>
         <p:nvSpPr>
-          <p:cNvPr id="2057927618" name="Notes Placeholder 2"/>
+          <p:cNvPr id="1433716520" name="Notes Placeholder 2"/>
           <p:cNvSpPr>
             <a:spLocks noGrp="1"/>
           </p:cNvSpPr>
@@ -1582,7 +1582,7 @@
       </p:sp>
       <p:sp>
         <p:nvSpPr>
-          <p:cNvPr id="1391457702" name="Slide Number Placeholder 3"/>
+          <p:cNvPr id="1025122562" name="Slide Number Placeholder 3"/>
           <p:cNvSpPr>
             <a:spLocks noGrp="1"/>
           </p:cNvSpPr>
@@ -1633,7 +1633,7 @@
       </p:grpSpPr>
       <p:sp>
         <p:nvSpPr>
-          <p:cNvPr id="2" name="Slide Image Placeholder 1"/>
+          <p:cNvPr id="170848767" name="Slide Image Placeholder 1"/>
           <p:cNvSpPr>
             <a:spLocks noChangeAspect="1" noGrp="1" noRot="1"/>
           </p:cNvSpPr>
@@ -1645,7 +1645,7 @@
       </p:sp>
       <p:sp>
         <p:nvSpPr>
-          <p:cNvPr id="3" name="Notes Placeholder 2"/>
+          <p:cNvPr id="2055853812" name="Notes Placeholder 2"/>
           <p:cNvSpPr>
             <a:spLocks noGrp="1"/>
           </p:cNvSpPr>
@@ -1667,7 +1667,7 @@
       </p:sp>
       <p:sp>
         <p:nvSpPr>
-          <p:cNvPr id="4" name="Slide Number Placeholder 3"/>
+          <p:cNvPr id="1272184363" name="Slide Number Placeholder 3"/>
           <p:cNvSpPr>
             <a:spLocks noGrp="1"/>
           </p:cNvSpPr>
@@ -1718,7 +1718,7 @@
       </p:grpSpPr>
       <p:sp>
         <p:nvSpPr>
-          <p:cNvPr id="2" name="Slide Image Placeholder 1"/>
+          <p:cNvPr id="2109233984" name="Slide Image Placeholder 1"/>
           <p:cNvSpPr>
             <a:spLocks noChangeAspect="1" noGrp="1" noRot="1"/>
           </p:cNvSpPr>
@@ -1730,7 +1730,7 @@
       </p:sp>
       <p:sp>
         <p:nvSpPr>
-          <p:cNvPr id="3" name="Notes Placeholder 2"/>
+          <p:cNvPr id="1336536255" name="Notes Placeholder 2"/>
           <p:cNvSpPr>
             <a:spLocks noGrp="1"/>
           </p:cNvSpPr>
@@ -1752,7 +1752,7 @@
       </p:sp>
       <p:sp>
         <p:nvSpPr>
-          <p:cNvPr id="4" name="Slide Number Placeholder 3"/>
+          <p:cNvPr id="76467178" name="Slide Number Placeholder 3"/>
           <p:cNvSpPr>
             <a:spLocks noGrp="1"/>
           </p:cNvSpPr>
@@ -1803,7 +1803,7 @@
       </p:grpSpPr>
       <p:sp>
         <p:nvSpPr>
-          <p:cNvPr id="2" name="Slide Image Placeholder 1"/>
+          <p:cNvPr id="1434000794" name="Slide Image Placeholder 1"/>
           <p:cNvSpPr>
             <a:spLocks noChangeAspect="1" noGrp="1" noRot="1"/>
           </p:cNvSpPr>
@@ -1815,7 +1815,7 @@
       </p:sp>
       <p:sp>
         <p:nvSpPr>
-          <p:cNvPr id="3" name="Notes Placeholder 2"/>
+          <p:cNvPr id="1720157360" name="Notes Placeholder 2"/>
           <p:cNvSpPr>
             <a:spLocks noGrp="1"/>
           </p:cNvSpPr>
@@ -1837,7 +1837,7 @@
       </p:sp>
       <p:sp>
         <p:nvSpPr>
-          <p:cNvPr id="4" name="Slide Number Placeholder 3"/>
+          <p:cNvPr id="692880201" name="Slide Number Placeholder 3"/>
           <p:cNvSpPr>
             <a:spLocks noGrp="1"/>
           </p:cNvSpPr>
@@ -1888,7 +1888,7 @@
       </p:grpSpPr>
       <p:sp>
         <p:nvSpPr>
-          <p:cNvPr id="2" name="Slide Image Placeholder 1"/>
+          <p:cNvPr id="1813092363" name="Slide Image Placeholder 1"/>
           <p:cNvSpPr>
             <a:spLocks noChangeAspect="1" noGrp="1" noRot="1"/>
           </p:cNvSpPr>
@@ -1900,7 +1900,7 @@
       </p:sp>
       <p:sp>
         <p:nvSpPr>
-          <p:cNvPr id="3" name="Notes Placeholder 2"/>
+          <p:cNvPr id="1348044670" name="Notes Placeholder 2"/>
           <p:cNvSpPr>
             <a:spLocks noGrp="1"/>
           </p:cNvSpPr>
@@ -1922,7 +1922,7 @@
       </p:sp>
       <p:sp>
         <p:nvSpPr>
-          <p:cNvPr id="4" name="Slide Number Placeholder 3"/>
+          <p:cNvPr id="1626850198" name="Slide Number Placeholder 3"/>
           <p:cNvSpPr>
             <a:spLocks noGrp="1"/>
           </p:cNvSpPr>
@@ -1973,7 +1973,7 @@
       </p:grpSpPr>
       <p:sp>
         <p:nvSpPr>
-          <p:cNvPr id="2" name="Slide Image Placeholder 1"/>
+          <p:cNvPr id="1503485202" name="Slide Image Placeholder 1"/>
           <p:cNvSpPr>
             <a:spLocks noChangeAspect="1" noGrp="1" noRot="1"/>
           </p:cNvSpPr>
@@ -1985,7 +1985,7 @@
       </p:sp>
       <p:sp>
         <p:nvSpPr>
-          <p:cNvPr id="3" name="Notes Placeholder 2"/>
+          <p:cNvPr id="1617545109" name="Notes Placeholder 2"/>
           <p:cNvSpPr>
             <a:spLocks noGrp="1"/>
           </p:cNvSpPr>
@@ -2007,7 +2007,7 @@
       </p:sp>
       <p:sp>
         <p:nvSpPr>
-          <p:cNvPr id="4" name="Slide Number Placeholder 3"/>
+          <p:cNvPr id="1967221203" name="Slide Number Placeholder 3"/>
           <p:cNvSpPr>
             <a:spLocks noGrp="1"/>
           </p:cNvSpPr>
@@ -2058,7 +2058,7 @@
       </p:grpSpPr>
       <p:sp>
         <p:nvSpPr>
-          <p:cNvPr id="2" name="Slide Image Placeholder 1"/>
+          <p:cNvPr id="474678580" name="Slide Image Placeholder 1"/>
           <p:cNvSpPr>
             <a:spLocks noChangeAspect="1" noGrp="1" noRot="1"/>
           </p:cNvSpPr>
@@ -2070,7 +2070,7 @@
       </p:sp>
       <p:sp>
         <p:nvSpPr>
-          <p:cNvPr id="3" name="Notes Placeholder 2"/>
+          <p:cNvPr id="676147544" name="Notes Placeholder 2"/>
           <p:cNvSpPr>
             <a:spLocks noGrp="1"/>
           </p:cNvSpPr>
@@ -2092,7 +2092,7 @@
       </p:sp>
       <p:sp>
         <p:nvSpPr>
-          <p:cNvPr id="4" name="Slide Number Placeholder 3"/>
+          <p:cNvPr id="273624187" name="Slide Number Placeholder 3"/>
           <p:cNvSpPr>
             <a:spLocks noGrp="1"/>
           </p:cNvSpPr>
@@ -2143,7 +2143,7 @@
       </p:grpSpPr>
       <p:sp>
         <p:nvSpPr>
-          <p:cNvPr id="2" name="Slide Image Placeholder 1"/>
+          <p:cNvPr id="395235755" name="Slide Image Placeholder 1"/>
           <p:cNvSpPr>
             <a:spLocks noChangeAspect="1" noGrp="1" noRot="1"/>
           </p:cNvSpPr>
@@ -2155,7 +2155,7 @@
       </p:sp>
       <p:sp>
         <p:nvSpPr>
-          <p:cNvPr id="3" name="Notes Placeholder 2"/>
+          <p:cNvPr id="1929250562" name="Notes Placeholder 2"/>
           <p:cNvSpPr>
             <a:spLocks noGrp="1"/>
           </p:cNvSpPr>
@@ -2177,7 +2177,7 @@
       </p:sp>
       <p:sp>
         <p:nvSpPr>
-          <p:cNvPr id="4" name="Slide Number Placeholder 3"/>
+          <p:cNvPr id="1301745535" name="Slide Number Placeholder 3"/>
           <p:cNvSpPr>
             <a:spLocks noGrp="1"/>
           </p:cNvSpPr>
@@ -2228,7 +2228,7 @@
       </p:grpSpPr>
       <p:sp>
         <p:nvSpPr>
-          <p:cNvPr id="2" name="Slide Image Placeholder 1"/>
+          <p:cNvPr id="1551428798" name="Slide Image Placeholder 1"/>
           <p:cNvSpPr>
             <a:spLocks noChangeAspect="1" noGrp="1" noRot="1"/>
           </p:cNvSpPr>
@@ -2240,7 +2240,7 @@
       </p:sp>
       <p:sp>
         <p:nvSpPr>
-          <p:cNvPr id="3" name="Notes Placeholder 2"/>
+          <p:cNvPr id="2121261403" name="Notes Placeholder 2"/>
           <p:cNvSpPr>
             <a:spLocks noGrp="1"/>
           </p:cNvSpPr>
@@ -2262,7 +2262,7 @@
       </p:sp>
       <p:sp>
         <p:nvSpPr>
-          <p:cNvPr id="4" name="Slide Number Placeholder 3"/>
+          <p:cNvPr id="111539845" name="Slide Number Placeholder 3"/>
           <p:cNvSpPr>
             <a:spLocks noGrp="1"/>
           </p:cNvSpPr>
@@ -2313,7 +2313,7 @@
       </p:grpSpPr>
       <p:sp>
         <p:nvSpPr>
-          <p:cNvPr id="2" name="Slide Image Placeholder 1"/>
+          <p:cNvPr id="435053057" name="Slide Image Placeholder 1"/>
           <p:cNvSpPr>
             <a:spLocks noChangeAspect="1" noGrp="1" noRot="1"/>
           </p:cNvSpPr>
@@ -2325,7 +2325,7 @@
       </p:sp>
       <p:sp>
         <p:nvSpPr>
-          <p:cNvPr id="3" name="Notes Placeholder 2"/>
+          <p:cNvPr id="970175824" name="Notes Placeholder 2"/>
           <p:cNvSpPr>
             <a:spLocks noGrp="1"/>
           </p:cNvSpPr>
@@ -2347,7 +2347,7 @@
       </p:sp>
       <p:sp>
         <p:nvSpPr>
-          <p:cNvPr id="4" name="Slide Number Placeholder 3"/>
+          <p:cNvPr id="935834519" name="Slide Number Placeholder 3"/>
           <p:cNvSpPr>
             <a:spLocks noGrp="1"/>
           </p:cNvSpPr>
@@ -2398,7 +2398,7 @@
       </p:grpSpPr>
       <p:sp>
         <p:nvSpPr>
-          <p:cNvPr id="1054929923" name="Title 1"/>
+          <p:cNvPr id="1563209063" name="Title 1"/>
           <p:cNvSpPr>
             <a:spLocks noGrp="1"/>
           </p:cNvSpPr>
@@ -2433,7 +2433,7 @@
       </p:sp>
       <p:sp>
         <p:nvSpPr>
-          <p:cNvPr id="1759389023" name="Subtitle 2"/>
+          <p:cNvPr id="1479704459" name="Subtitle 2"/>
           <p:cNvSpPr>
             <a:spLocks noGrp="1"/>
           </p:cNvSpPr>
@@ -2501,7 +2501,7 @@
       </p:sp>
       <p:sp>
         <p:nvSpPr>
-          <p:cNvPr id="106757784" name="Date Placeholder 3"/>
+          <p:cNvPr id="326440240" name="Date Placeholder 3"/>
           <p:cNvSpPr>
             <a:spLocks noGrp="1"/>
           </p:cNvSpPr>
@@ -2527,7 +2527,7 @@
       </p:sp>
       <p:sp>
         <p:nvSpPr>
-          <p:cNvPr id="2134904481" name="Footer Placeholder 4"/>
+          <p:cNvPr id="538121798" name="Footer Placeholder 4"/>
           <p:cNvSpPr>
             <a:spLocks noGrp="1"/>
           </p:cNvSpPr>
@@ -2549,7 +2549,7 @@
       </p:sp>
       <p:sp>
         <p:nvSpPr>
-          <p:cNvPr id="854171669" name="Slide Number Placeholder 5"/>
+          <p:cNvPr id="77403370" name="Slide Number Placeholder 5"/>
           <p:cNvSpPr>
             <a:spLocks noGrp="1"/>
           </p:cNvSpPr>
@@ -2600,7 +2600,7 @@
       </p:grpSpPr>
       <p:sp>
         <p:nvSpPr>
-          <p:cNvPr id="191038040" name="Title 1"/>
+          <p:cNvPr id="842786140" name="Title 1"/>
           <p:cNvSpPr>
             <a:spLocks noGrp="1"/>
           </p:cNvSpPr>
@@ -2626,7 +2626,7 @@
       </p:sp>
       <p:sp>
         <p:nvSpPr>
-          <p:cNvPr id="785869009" name="Vertical Text Placeholder 2"/>
+          <p:cNvPr id="1072266560" name="Vertical Text Placeholder 2"/>
           <p:cNvSpPr>
             <a:spLocks noGrp="1"/>
           </p:cNvSpPr>
@@ -2692,7 +2692,7 @@
       </p:sp>
       <p:sp>
         <p:nvSpPr>
-          <p:cNvPr id="2064374710" name="Date Placeholder 3"/>
+          <p:cNvPr id="253881693" name="Date Placeholder 3"/>
           <p:cNvSpPr>
             <a:spLocks noGrp="1"/>
           </p:cNvSpPr>
@@ -2718,7 +2718,7 @@
       </p:sp>
       <p:sp>
         <p:nvSpPr>
-          <p:cNvPr id="191736323" name="Footer Placeholder 4"/>
+          <p:cNvPr id="1762937499" name="Footer Placeholder 4"/>
           <p:cNvSpPr>
             <a:spLocks noGrp="1"/>
           </p:cNvSpPr>
@@ -2740,7 +2740,7 @@
       </p:sp>
       <p:sp>
         <p:nvSpPr>
-          <p:cNvPr id="947797890" name="Slide Number Placeholder 5"/>
+          <p:cNvPr id="314185225" name="Slide Number Placeholder 5"/>
           <p:cNvSpPr>
             <a:spLocks noGrp="1"/>
           </p:cNvSpPr>
@@ -2791,7 +2791,7 @@
       </p:grpSpPr>
       <p:sp>
         <p:nvSpPr>
-          <p:cNvPr id="224080065" name="Vertical Title 1"/>
+          <p:cNvPr id="1636128674" name="Vertical Title 1"/>
           <p:cNvSpPr>
             <a:spLocks noGrp="1"/>
           </p:cNvSpPr>
@@ -2822,7 +2822,7 @@
       </p:sp>
       <p:sp>
         <p:nvSpPr>
-          <p:cNvPr id="677642943" name="Vertical Text Placeholder 2"/>
+          <p:cNvPr id="1909737326" name="Vertical Text Placeholder 2"/>
           <p:cNvSpPr>
             <a:spLocks noGrp="1"/>
           </p:cNvSpPr>
@@ -2893,7 +2893,7 @@
       </p:sp>
       <p:sp>
         <p:nvSpPr>
-          <p:cNvPr id="888631389" name="Date Placeholder 3"/>
+          <p:cNvPr id="1743668761" name="Date Placeholder 3"/>
           <p:cNvSpPr>
             <a:spLocks noGrp="1"/>
           </p:cNvSpPr>
@@ -2919,7 +2919,7 @@
       </p:sp>
       <p:sp>
         <p:nvSpPr>
-          <p:cNvPr id="571011979" name="Footer Placeholder 4"/>
+          <p:cNvPr id="1554543122" name="Footer Placeholder 4"/>
           <p:cNvSpPr>
             <a:spLocks noGrp="1"/>
           </p:cNvSpPr>
@@ -2941,7 +2941,7 @@
       </p:sp>
       <p:sp>
         <p:nvSpPr>
-          <p:cNvPr id="1604807802" name="Slide Number Placeholder 5"/>
+          <p:cNvPr id="1673559907" name="Slide Number Placeholder 5"/>
           <p:cNvSpPr>
             <a:spLocks noGrp="1"/>
           </p:cNvSpPr>
@@ -2992,7 +2992,7 @@
       </p:grpSpPr>
       <p:sp>
         <p:nvSpPr>
-          <p:cNvPr id="1170771761" name="Title 1"/>
+          <p:cNvPr id="956447349" name="Title 1"/>
           <p:cNvSpPr>
             <a:spLocks noGrp="1"/>
           </p:cNvSpPr>
@@ -3018,7 +3018,7 @@
       </p:sp>
       <p:sp>
         <p:nvSpPr>
-          <p:cNvPr id="647286988" name="Content Placeholder 2"/>
+          <p:cNvPr id="1385163796" name="Content Placeholder 2"/>
           <p:cNvSpPr>
             <a:spLocks noGrp="1"/>
           </p:cNvSpPr>
@@ -3084,7 +3084,7 @@
       </p:sp>
       <p:sp>
         <p:nvSpPr>
-          <p:cNvPr id="699813286" name="Date Placeholder 3"/>
+          <p:cNvPr id="1244039823" name="Date Placeholder 3"/>
           <p:cNvSpPr>
             <a:spLocks noGrp="1"/>
           </p:cNvSpPr>
@@ -3110,7 +3110,7 @@
       </p:sp>
       <p:sp>
         <p:nvSpPr>
-          <p:cNvPr id="1573584184" name="Footer Placeholder 4"/>
+          <p:cNvPr id="1391836076" name="Footer Placeholder 4"/>
           <p:cNvSpPr>
             <a:spLocks noGrp="1"/>
           </p:cNvSpPr>
@@ -3132,7 +3132,7 @@
       </p:sp>
       <p:sp>
         <p:nvSpPr>
-          <p:cNvPr id="224620371" name="Slide Number Placeholder 5"/>
+          <p:cNvPr id="115458086" name="Slide Number Placeholder 5"/>
           <p:cNvSpPr>
             <a:spLocks noGrp="1"/>
           </p:cNvSpPr>
@@ -3183,7 +3183,7 @@
       </p:grpSpPr>
       <p:sp>
         <p:nvSpPr>
-          <p:cNvPr id="1938448652" name="Title 1"/>
+          <p:cNvPr id="1113320853" name="Title 1"/>
           <p:cNvSpPr>
             <a:spLocks noGrp="1"/>
           </p:cNvSpPr>
@@ -3218,7 +3218,7 @@
       </p:sp>
       <p:sp>
         <p:nvSpPr>
-          <p:cNvPr id="2023355450" name="Text Placeholder 2"/>
+          <p:cNvPr id="140478589" name="Text Placeholder 2"/>
           <p:cNvSpPr>
             <a:spLocks noGrp="1"/>
           </p:cNvSpPr>
@@ -3340,7 +3340,7 @@
       </p:sp>
       <p:sp>
         <p:nvSpPr>
-          <p:cNvPr id="1422733523" name="Date Placeholder 3"/>
+          <p:cNvPr id="1015082290" name="Date Placeholder 3"/>
           <p:cNvSpPr>
             <a:spLocks noGrp="1"/>
           </p:cNvSpPr>
@@ -3366,7 +3366,7 @@
       </p:sp>
       <p:sp>
         <p:nvSpPr>
-          <p:cNvPr id="431785073" name="Footer Placeholder 4"/>
+          <p:cNvPr id="1285717691" name="Footer Placeholder 4"/>
           <p:cNvSpPr>
             <a:spLocks noGrp="1"/>
           </p:cNvSpPr>
@@ -3388,7 +3388,7 @@
       </p:sp>
       <p:sp>
         <p:nvSpPr>
-          <p:cNvPr id="420617121" name="Slide Number Placeholder 5"/>
+          <p:cNvPr id="1740146171" name="Slide Number Placeholder 5"/>
           <p:cNvSpPr>
             <a:spLocks noGrp="1"/>
           </p:cNvSpPr>
@@ -3439,7 +3439,7 @@
       </p:grpSpPr>
       <p:sp>
         <p:nvSpPr>
-          <p:cNvPr id="543185278" name="Title 1"/>
+          <p:cNvPr id="780818835" name="Title 1"/>
           <p:cNvSpPr>
             <a:spLocks noGrp="1"/>
           </p:cNvSpPr>
@@ -3465,7 +3465,7 @@
       </p:sp>
       <p:sp>
         <p:nvSpPr>
-          <p:cNvPr id="2059999756" name="Content Placeholder 2"/>
+          <p:cNvPr id="1784543997" name="Content Placeholder 2"/>
           <p:cNvSpPr>
             <a:spLocks noGrp="1"/>
           </p:cNvSpPr>
@@ -3536,7 +3536,7 @@
       </p:sp>
       <p:sp>
         <p:nvSpPr>
-          <p:cNvPr id="1217684751" name="Content Placeholder 3"/>
+          <p:cNvPr id="541529297" name="Content Placeholder 3"/>
           <p:cNvSpPr>
             <a:spLocks noGrp="1"/>
           </p:cNvSpPr>
@@ -3607,7 +3607,7 @@
       </p:sp>
       <p:sp>
         <p:nvSpPr>
-          <p:cNvPr id="1548675672" name="Date Placeholder 4"/>
+          <p:cNvPr id="457357562" name="Date Placeholder 4"/>
           <p:cNvSpPr>
             <a:spLocks noGrp="1"/>
           </p:cNvSpPr>
@@ -3633,7 +3633,7 @@
       </p:sp>
       <p:sp>
         <p:nvSpPr>
-          <p:cNvPr id="1200965014" name="Footer Placeholder 5"/>
+          <p:cNvPr id="1959966642" name="Footer Placeholder 5"/>
           <p:cNvSpPr>
             <a:spLocks noGrp="1"/>
           </p:cNvSpPr>
@@ -3655,7 +3655,7 @@
       </p:sp>
       <p:sp>
         <p:nvSpPr>
-          <p:cNvPr id="242772628" name="Slide Number Placeholder 6"/>
+          <p:cNvPr id="1906155175" name="Slide Number Placeholder 6"/>
           <p:cNvSpPr>
             <a:spLocks noGrp="1"/>
           </p:cNvSpPr>
@@ -3706,7 +3706,7 @@
       </p:grpSpPr>
       <p:sp>
         <p:nvSpPr>
-          <p:cNvPr id="1461304707" name="Title 1"/>
+          <p:cNvPr id="853783233" name="Title 1"/>
           <p:cNvSpPr>
             <a:spLocks noGrp="1"/>
           </p:cNvSpPr>
@@ -3737,7 +3737,7 @@
       </p:sp>
       <p:sp>
         <p:nvSpPr>
-          <p:cNvPr id="347055316" name="Text Placeholder 2"/>
+          <p:cNvPr id="1274170428" name="Text Placeholder 2"/>
           <p:cNvSpPr>
             <a:spLocks noGrp="1"/>
           </p:cNvSpPr>
@@ -3805,7 +3805,7 @@
       </p:sp>
       <p:sp>
         <p:nvSpPr>
-          <p:cNvPr id="1848600112" name="Content Placeholder 3"/>
+          <p:cNvPr id="425463101" name="Content Placeholder 3"/>
           <p:cNvSpPr>
             <a:spLocks noGrp="1"/>
           </p:cNvSpPr>
@@ -3876,7 +3876,7 @@
       </p:sp>
       <p:sp>
         <p:nvSpPr>
-          <p:cNvPr id="2030352633" name="Text Placeholder 4"/>
+          <p:cNvPr id="13288419" name="Text Placeholder 4"/>
           <p:cNvSpPr>
             <a:spLocks noGrp="1"/>
           </p:cNvSpPr>
@@ -3944,7 +3944,7 @@
       </p:sp>
       <p:sp>
         <p:nvSpPr>
-          <p:cNvPr id="868255558" name="Content Placeholder 5"/>
+          <p:cNvPr id="2093191018" name="Content Placeholder 5"/>
           <p:cNvSpPr>
             <a:spLocks noGrp="1"/>
           </p:cNvSpPr>
@@ -4015,7 +4015,7 @@
       </p:sp>
       <p:sp>
         <p:nvSpPr>
-          <p:cNvPr id="1550814265" name="Date Placeholder 6"/>
+          <p:cNvPr id="1188269092" name="Date Placeholder 6"/>
           <p:cNvSpPr>
             <a:spLocks noGrp="1"/>
           </p:cNvSpPr>
@@ -4041,7 +4041,7 @@
       </p:sp>
       <p:sp>
         <p:nvSpPr>
-          <p:cNvPr id="249597770" name="Footer Placeholder 7"/>
+          <p:cNvPr id="586024343" name="Footer Placeholder 7"/>
           <p:cNvSpPr>
             <a:spLocks noGrp="1"/>
           </p:cNvSpPr>
@@ -4063,7 +4063,7 @@
       </p:sp>
       <p:sp>
         <p:nvSpPr>
-          <p:cNvPr id="1276879765" name="Slide Number Placeholder 8"/>
+          <p:cNvPr id="397853327" name="Slide Number Placeholder 8"/>
           <p:cNvSpPr>
             <a:spLocks noGrp="1"/>
           </p:cNvSpPr>
@@ -4114,7 +4114,7 @@
       </p:grpSpPr>
       <p:sp>
         <p:nvSpPr>
-          <p:cNvPr id="128638979" name="Title 1"/>
+          <p:cNvPr id="521476098" name="Title 1"/>
           <p:cNvSpPr>
             <a:spLocks noGrp="1"/>
           </p:cNvSpPr>
@@ -4140,7 +4140,7 @@
       </p:sp>
       <p:sp>
         <p:nvSpPr>
-          <p:cNvPr id="357957667" name="Date Placeholder 2"/>
+          <p:cNvPr id="1956477507" name="Date Placeholder 2"/>
           <p:cNvSpPr>
             <a:spLocks noGrp="1"/>
           </p:cNvSpPr>
@@ -4166,7 +4166,7 @@
       </p:sp>
       <p:sp>
         <p:nvSpPr>
-          <p:cNvPr id="2105106674" name="Footer Placeholder 3"/>
+          <p:cNvPr id="1759241994" name="Footer Placeholder 3"/>
           <p:cNvSpPr>
             <a:spLocks noGrp="1"/>
           </p:cNvSpPr>
@@ -4188,7 +4188,7 @@
       </p:sp>
       <p:sp>
         <p:nvSpPr>
-          <p:cNvPr id="1129731976" name="Slide Number Placeholder 4"/>
+          <p:cNvPr id="1606858547" name="Slide Number Placeholder 4"/>
           <p:cNvSpPr>
             <a:spLocks noGrp="1"/>
           </p:cNvSpPr>
@@ -4239,7 +4239,7 @@
       </p:grpSpPr>
       <p:sp>
         <p:nvSpPr>
-          <p:cNvPr id="284406047" name="Date Placeholder 1"/>
+          <p:cNvPr id="1453811265" name="Date Placeholder 1"/>
           <p:cNvSpPr>
             <a:spLocks noGrp="1"/>
           </p:cNvSpPr>
@@ -4265,7 +4265,7 @@
       </p:sp>
       <p:sp>
         <p:nvSpPr>
-          <p:cNvPr id="1508342643" name="Footer Placeholder 2"/>
+          <p:cNvPr id="696441787" name="Footer Placeholder 2"/>
           <p:cNvSpPr>
             <a:spLocks noGrp="1"/>
           </p:cNvSpPr>
@@ -4287,7 +4287,7 @@
       </p:sp>
       <p:sp>
         <p:nvSpPr>
-          <p:cNvPr id="1673168124" name="Slide Number Placeholder 3"/>
+          <p:cNvPr id="1269611867" name="Slide Number Placeholder 3"/>
           <p:cNvSpPr>
             <a:spLocks noGrp="1"/>
           </p:cNvSpPr>
@@ -4338,7 +4338,7 @@
       </p:grpSpPr>
       <p:sp>
         <p:nvSpPr>
-          <p:cNvPr id="545971187" name="Title 1"/>
+          <p:cNvPr id="404435827" name="Title 1"/>
           <p:cNvSpPr>
             <a:spLocks noGrp="1"/>
           </p:cNvSpPr>
@@ -4373,7 +4373,7 @@
       </p:sp>
       <p:sp>
         <p:nvSpPr>
-          <p:cNvPr id="816657952" name="Content Placeholder 2"/>
+          <p:cNvPr id="832481187" name="Content Placeholder 2"/>
           <p:cNvSpPr>
             <a:spLocks noGrp="1"/>
           </p:cNvSpPr>
@@ -4472,7 +4472,7 @@
       </p:sp>
       <p:sp>
         <p:nvSpPr>
-          <p:cNvPr id="1829169159" name="Text Placeholder 3"/>
+          <p:cNvPr id="288108853" name="Text Placeholder 3"/>
           <p:cNvSpPr>
             <a:spLocks noGrp="1"/>
           </p:cNvSpPr>
@@ -4540,7 +4540,7 @@
       </p:sp>
       <p:sp>
         <p:nvSpPr>
-          <p:cNvPr id="689204885" name="Date Placeholder 4"/>
+          <p:cNvPr id="1349163499" name="Date Placeholder 4"/>
           <p:cNvSpPr>
             <a:spLocks noGrp="1"/>
           </p:cNvSpPr>
@@ -4566,7 +4566,7 @@
       </p:sp>
       <p:sp>
         <p:nvSpPr>
-          <p:cNvPr id="1957504130" name="Footer Placeholder 5"/>
+          <p:cNvPr id="1626625690" name="Footer Placeholder 5"/>
           <p:cNvSpPr>
             <a:spLocks noGrp="1"/>
           </p:cNvSpPr>
@@ -4588,7 +4588,7 @@
       </p:sp>
       <p:sp>
         <p:nvSpPr>
-          <p:cNvPr id="552025729" name="Slide Number Placeholder 6"/>
+          <p:cNvPr id="1113883516" name="Slide Number Placeholder 6"/>
           <p:cNvSpPr>
             <a:spLocks noGrp="1"/>
           </p:cNvSpPr>
@@ -4639,7 +4639,7 @@
       </p:grpSpPr>
       <p:sp>
         <p:nvSpPr>
-          <p:cNvPr id="769064104" name="Title 1"/>
+          <p:cNvPr id="159700646" name="Title 1"/>
           <p:cNvSpPr>
             <a:spLocks noGrp="1"/>
           </p:cNvSpPr>
@@ -4674,7 +4674,7 @@
       </p:sp>
       <p:sp>
         <p:nvSpPr>
-          <p:cNvPr id="1053162174" name="Picture Placeholder 2"/>
+          <p:cNvPr id="1999445447" name="Picture Placeholder 2"/>
           <p:cNvSpPr>
             <a:spLocks noGrp="1"/>
           </p:cNvSpPr>
@@ -4738,7 +4738,7 @@
       </p:sp>
       <p:sp>
         <p:nvSpPr>
-          <p:cNvPr id="312201547" name="Text Placeholder 3"/>
+          <p:cNvPr id="828361423" name="Text Placeholder 3"/>
           <p:cNvSpPr>
             <a:spLocks noGrp="1"/>
           </p:cNvSpPr>
@@ -4806,7 +4806,7 @@
       </p:sp>
       <p:sp>
         <p:nvSpPr>
-          <p:cNvPr id="1102432438" name="Date Placeholder 4"/>
+          <p:cNvPr id="82748405" name="Date Placeholder 4"/>
           <p:cNvSpPr>
             <a:spLocks noGrp="1"/>
           </p:cNvSpPr>
@@ -4832,7 +4832,7 @@
       </p:sp>
       <p:sp>
         <p:nvSpPr>
-          <p:cNvPr id="1275730566" name="Footer Placeholder 5"/>
+          <p:cNvPr id="1683503508" name="Footer Placeholder 5"/>
           <p:cNvSpPr>
             <a:spLocks noGrp="1"/>
           </p:cNvSpPr>
@@ -4854,7 +4854,7 @@
       </p:sp>
       <p:sp>
         <p:nvSpPr>
-          <p:cNvPr id="382164618" name="Slide Number Placeholder 6"/>
+          <p:cNvPr id="295882512" name="Slide Number Placeholder 6"/>
           <p:cNvSpPr>
             <a:spLocks noGrp="1"/>
           </p:cNvSpPr>
@@ -4910,7 +4910,7 @@
       </p:grpSpPr>
       <p:sp>
         <p:nvSpPr>
-          <p:cNvPr id="1072114418" name="Title Placeholder 1"/>
+          <p:cNvPr id="688948040" name="Title Placeholder 1"/>
           <p:cNvSpPr>
             <a:spLocks noGrp="1"/>
           </p:cNvSpPr>
@@ -4946,7 +4946,7 @@
       </p:sp>
       <p:sp>
         <p:nvSpPr>
-          <p:cNvPr id="1794140653" name="Text Placeholder 2"/>
+          <p:cNvPr id="175538616" name="Text Placeholder 2"/>
           <p:cNvSpPr>
             <a:spLocks noGrp="1"/>
           </p:cNvSpPr>
@@ -5022,7 +5022,7 @@
       </p:sp>
       <p:sp>
         <p:nvSpPr>
-          <p:cNvPr id="320051945" name="Date Placeholder 3"/>
+          <p:cNvPr id="1886168981" name="Date Placeholder 3"/>
           <p:cNvSpPr>
             <a:spLocks noGrp="1"/>
           </p:cNvSpPr>
@@ -5066,7 +5066,7 @@
       </p:sp>
       <p:sp>
         <p:nvSpPr>
-          <p:cNvPr id="2084706297" name="Footer Placeholder 4"/>
+          <p:cNvPr id="151895256" name="Footer Placeholder 4"/>
           <p:cNvSpPr>
             <a:spLocks noGrp="1"/>
           </p:cNvSpPr>
@@ -5106,7 +5106,7 @@
       </p:sp>
       <p:sp>
         <p:nvSpPr>
-          <p:cNvPr id="676151130" name="Slide Number Placeholder 5"/>
+          <p:cNvPr id="1420584370" name="Slide Number Placeholder 5"/>
           <p:cNvSpPr>
             <a:spLocks noGrp="1"/>
           </p:cNvSpPr>
@@ -5467,7 +5467,7 @@
       </p:grpSpPr>
       <p:sp>
         <p:nvSpPr>
-          <p:cNvPr id="203136638" name="Title 1"/>
+          <p:cNvPr id="510975554" name="Title 1"/>
           <p:cNvSpPr>
             <a:spLocks noGrp="1"/>
           </p:cNvSpPr>
@@ -5516,7 +5516,7 @@
       </p:sp>
       <p:sp>
         <p:nvSpPr>
-          <p:cNvPr id="938097126" name="Subtitle 2"/>
+          <p:cNvPr id="1427071317" name="Subtitle 2"/>
           <p:cNvSpPr>
             <a:spLocks noGrp="1"/>
           </p:cNvSpPr>
@@ -5544,19 +5544,6 @@
                 <a:latin typeface="Arial"/>
                 <a:cs typeface="Arial"/>
               </a:rPr>
-              <a:t>Micah Kruser, NW Energy Coalition</a:t>
-            </a:r>
-            <a:endParaRPr/>
-          </a:p>
-          <a:p>
-            <a:pPr>
-              <a:defRPr/>
-            </a:pPr>
-            <a:r>
-              <a:rPr lang="en-US">
-                <a:latin typeface="Arial"/>
-                <a:cs typeface="Arial"/>
-              </a:rPr>
               <a:t>Charlee Thompson, NW Energy Coalition</a:t>
             </a:r>
             <a:endParaRPr/>
@@ -5565,7 +5552,7 @@
       </p:sp>
       <p:sp>
         <p:nvSpPr>
-          <p:cNvPr id="471566453" name="Slide Number Placeholder 3"/>
+          <p:cNvPr id="164030779" name="Slide Number Placeholder 3"/>
           <p:cNvSpPr>
             <a:spLocks noGrp="1"/>
           </p:cNvSpPr>
@@ -5624,14 +5611,14 @@
       </p:grpSpPr>
       <p:sp>
         <p:nvSpPr>
-          <p:cNvPr id="28806020" name="TextBox 13"/>
+          <p:cNvPr id="1532485816" name="TextBox 13"/>
           <p:cNvSpPr txBox="1"/>
           <p:nvPr/>
         </p:nvSpPr>
         <p:spPr bwMode="auto">
           <a:xfrm>
-            <a:off x="1980764" y="5435256"/>
-            <a:ext cx="7817905" cy="923330"/>
+            <a:off x="1980763" y="5435255"/>
+            <a:ext cx="7818624" cy="366119"/>
           </a:xfrm>
           <a:prstGeom prst="rect">
             <a:avLst/>
@@ -5650,34 +5637,26 @@
               <a:defRPr/>
             </a:pPr>
             <a:r>
-              <a:rPr lang="en-US">
+              <a:rPr lang="en-US" sz="1800" b="0" i="0" u="none" strike="noStrike" cap="none" spc="0">
+                <a:solidFill>
+                  <a:schemeClr val="tx1"/>
+                </a:solidFill>
+                <a:highlight>
+                  <a:srgbClr val="FFFF00"/>
+                </a:highlight>
                 <a:latin typeface="Arial"/>
+                <a:ea typeface="Arial"/>
                 <a:cs typeface="Arial"/>
               </a:rPr>
-              <a:t>Bill assistance enrollments have increased</a:t>
-            </a:r>
-            <a:endParaRPr/>
-          </a:p>
-          <a:p>
-            <a:pPr marL="285750" indent="-285750">
-              <a:buFont typeface="Arial"/>
-              <a:buChar char="•"/>
-              <a:defRPr/>
-            </a:pPr>
-            <a:r>
-              <a:rPr lang="en-US">
-                <a:latin typeface="Arial"/>
-                <a:cs typeface="Arial"/>
-              </a:rPr>
-              <a:t>PSE had spikes (Dec 2021, 2022) attributed to COVID-19 “CACAP” relief funding.</a:t>
-            </a:r>
-            <a:endParaRPr/>
-          </a:p>
-        </p:txBody>
-      </p:sp>
-      <p:sp>
-        <p:nvSpPr>
-          <p:cNvPr id="1775105227" name="Slide Number Placeholder 3"/>
+              <a:t>Key findings</a:t>
+            </a:r>
+            <a:endParaRPr/>
+          </a:p>
+        </p:txBody>
+      </p:sp>
+      <p:sp>
+        <p:nvSpPr>
+          <p:cNvPr id="1681835182" name="Slide Number Placeholder 3"/>
           <p:cNvSpPr>
             <a:spLocks noGrp="1"/>
           </p:cNvSpPr>
@@ -5701,28 +5680,6 @@
           </a:p>
         </p:txBody>
       </p:sp>
-      <p:pic>
-        <p:nvPicPr>
-          <p:cNvPr id="1581573249" name="Picture 1" descr="A graph of a number of individuals&#10;&#10;Description automatically generated"/>
-          <p:cNvPicPr>
-            <a:picLocks noChangeAspect="1"/>
-          </p:cNvPicPr>
-          <p:nvPr/>
-        </p:nvPicPr>
-        <p:blipFill>
-          <a:blip r:embed="rId3"/>
-          <a:stretch/>
-        </p:blipFill>
-        <p:spPr bwMode="auto">
-          <a:xfrm>
-            <a:off x="1981565" y="468147"/>
-            <a:ext cx="7810195" cy="4678037"/>
-          </a:xfrm>
-          <a:prstGeom prst="rect">
-            <a:avLst/>
-          </a:prstGeom>
-        </p:spPr>
-      </p:pic>
     </p:spTree>
   </p:cSld>
   <p:clrMapOvr>
@@ -5758,7 +5715,7 @@
       </p:grpSpPr>
       <p:sp>
         <p:nvSpPr>
-          <p:cNvPr id="1478670790" name="TextBox 13"/>
+          <p:cNvPr id="1444036252" name="TextBox 13"/>
           <p:cNvSpPr txBox="1"/>
           <p:nvPr/>
         </p:nvSpPr>
@@ -5820,7 +5777,7 @@
       </p:sp>
       <p:sp>
         <p:nvSpPr>
-          <p:cNvPr id="387694404" name="Slide Number Placeholder 3"/>
+          <p:cNvPr id="1778478065" name="Slide Number Placeholder 3"/>
           <p:cNvSpPr>
             <a:spLocks noGrp="1"/>
           </p:cNvSpPr>
@@ -5846,13 +5803,13 @@
       </p:sp>
       <p:pic>
         <p:nvPicPr>
-          <p:cNvPr id="614431328" name="Picture 2" descr="A graph with a line going down&#10;&#10;Description automatically generated"/>
+          <p:cNvPr id="1557369655" name="Picture 2" descr="A graph with a line going down&#10;&#10;Description automatically generated"/>
           <p:cNvPicPr>
             <a:picLocks noChangeAspect="1"/>
           </p:cNvPicPr>
           <p:nvPr/>
         </p:nvPicPr>
-        <p:blipFill>
+        <p:blipFill rotWithShape="1">
           <a:blip r:embed="rId3"/>
           <a:stretch/>
         </p:blipFill>
@@ -5868,13 +5825,13 @@
       </p:pic>
       <p:pic>
         <p:nvPicPr>
-          <p:cNvPr id="1472269690" name="Picture 4"/>
+          <p:cNvPr id="626680252" name="Picture 4"/>
           <p:cNvPicPr>
             <a:picLocks noChangeAspect="1"/>
           </p:cNvPicPr>
           <p:nvPr/>
         </p:nvPicPr>
-        <p:blipFill>
+        <p:blipFill rotWithShape="1">
           <a:blip r:embed="rId4"/>
           <a:stretch/>
         </p:blipFill>
@@ -5890,13 +5847,13 @@
       </p:pic>
       <p:pic>
         <p:nvPicPr>
-          <p:cNvPr id="1390082395" name="Picture 5" descr="A graph with a line going up&#10;&#10;Description automatically generated"/>
+          <p:cNvPr id="1886766951" name="Picture 5" descr="A graph with a line going up&#10;&#10;Description automatically generated"/>
           <p:cNvPicPr>
             <a:picLocks noChangeAspect="1"/>
           </p:cNvPicPr>
           <p:nvPr/>
         </p:nvPicPr>
-        <p:blipFill>
+        <p:blipFill rotWithShape="1">
           <a:blip r:embed="rId5"/>
           <a:stretch/>
         </p:blipFill>
@@ -5912,13 +5869,13 @@
       </p:pic>
       <p:pic>
         <p:nvPicPr>
-          <p:cNvPr id="46752248" name="Picture 6" descr="A graph showing the number of companies in the bill assistance program&#10;&#10;Description automatically generated"/>
+          <p:cNvPr id="1937111486" name="Picture 6" descr="A graph showing the number of companies in the bill assistance program&#10;&#10;Description automatically generated"/>
           <p:cNvPicPr>
             <a:picLocks noChangeAspect="1"/>
           </p:cNvPicPr>
           <p:nvPr/>
         </p:nvPicPr>
-        <p:blipFill>
+        <p:blipFill rotWithShape="1">
           <a:blip r:embed="rId6"/>
           <a:stretch/>
         </p:blipFill>
@@ -5934,13 +5891,13 @@
       </p:pic>
       <p:pic>
         <p:nvPicPr>
-          <p:cNvPr id="1723707604" name="Picture 1" descr="A graph of a number of individuals&#10;&#10;Description automatically generated"/>
+          <p:cNvPr id="1236423789" name="Picture 1" descr="A graph of a number of individuals&#10;&#10;Description automatically generated"/>
           <p:cNvPicPr>
             <a:picLocks noChangeAspect="1"/>
           </p:cNvPicPr>
           <p:nvPr/>
         </p:nvPicPr>
-        <p:blipFill>
+        <p:blipFill rotWithShape="1">
           <a:blip r:embed="rId7"/>
           <a:stretch/>
         </p:blipFill>
@@ -5989,13 +5946,13 @@
       </p:grpSpPr>
       <p:pic>
         <p:nvPicPr>
-          <p:cNvPr id="1969836722" name="Picture 4" descr="A graph of a number of customers with a number of payment arrangements&#10;&#10;Description automatically generated"/>
+          <p:cNvPr id="1465219791" name="Picture 4" descr="A graph of a number of customers with a number of payment arrangements&#10;&#10;Description automatically generated"/>
           <p:cNvPicPr>
             <a:picLocks noChangeAspect="1"/>
           </p:cNvPicPr>
           <p:nvPr/>
         </p:nvPicPr>
-        <p:blipFill>
+        <p:blipFill rotWithShape="1">
           <a:blip r:embed="rId3"/>
           <a:stretch/>
         </p:blipFill>
@@ -6011,7 +5968,7 @@
       </p:pic>
       <p:sp>
         <p:nvSpPr>
-          <p:cNvPr id="933811651" name="TextBox 7"/>
+          <p:cNvPr id="760270010" name="TextBox 7"/>
           <p:cNvSpPr txBox="1"/>
           <p:nvPr/>
         </p:nvSpPr>
@@ -6057,7 +6014,7 @@
       </p:sp>
       <p:sp>
         <p:nvSpPr>
-          <p:cNvPr id="183907196" name="Slide Number Placeholder 3"/>
+          <p:cNvPr id="1906866950" name="Slide Number Placeholder 3"/>
           <p:cNvSpPr>
             <a:spLocks noGrp="1"/>
           </p:cNvSpPr>
@@ -6083,13 +6040,13 @@
       </p:sp>
       <p:pic>
         <p:nvPicPr>
-          <p:cNvPr id="1496813291" name="Picture 1" descr="A graph of a number of customers with numbers&#10;&#10;Description automatically generated"/>
+          <p:cNvPr id="941833078" name="Picture 1" descr="A graph of a number of customers with numbers&#10;&#10;Description automatically generated"/>
           <p:cNvPicPr>
             <a:picLocks noChangeAspect="1"/>
           </p:cNvPicPr>
           <p:nvPr/>
         </p:nvPicPr>
-        <p:blipFill>
+        <p:blipFill rotWithShape="1">
           <a:blip r:embed="rId4"/>
           <a:stretch/>
         </p:blipFill>
@@ -6138,7 +6095,7 @@
       </p:grpSpPr>
       <p:sp>
         <p:nvSpPr>
-          <p:cNvPr id="891844175" name="TextBox 6"/>
+          <p:cNvPr id="645042745" name="TextBox 6"/>
           <p:cNvSpPr txBox="1"/>
           <p:nvPr/>
         </p:nvSpPr>
@@ -6182,7 +6139,7 @@
       </p:sp>
       <p:sp>
         <p:nvSpPr>
-          <p:cNvPr id="1994420480" name="Slide Number Placeholder 3"/>
+          <p:cNvPr id="782162058" name="Slide Number Placeholder 3"/>
           <p:cNvSpPr>
             <a:spLocks noGrp="1"/>
           </p:cNvSpPr>
@@ -6208,13 +6165,13 @@
       </p:sp>
       <p:pic>
         <p:nvPicPr>
-          <p:cNvPr id="1607017745" name="Picture 1" descr="A graph of a number of utility bills&#10;&#10;Description automatically generated"/>
+          <p:cNvPr id="1058580756" name="Picture 1" descr="A graph of a number of utility bills&#10;&#10;Description automatically generated"/>
           <p:cNvPicPr>
             <a:picLocks noChangeAspect="1"/>
           </p:cNvPicPr>
           <p:nvPr/>
         </p:nvPicPr>
-        <p:blipFill>
+        <p:blipFill rotWithShape="1">
           <a:blip r:embed="rId3"/>
           <a:stretch/>
         </p:blipFill>
@@ -6263,7 +6220,7 @@
       </p:grpSpPr>
       <p:sp>
         <p:nvSpPr>
-          <p:cNvPr id="1944258538" name="Slide Number Placeholder 1"/>
+          <p:cNvPr id="1070663624" name="Slide Number Placeholder 1"/>
           <p:cNvSpPr>
             <a:spLocks noGrp="1"/>
           </p:cNvSpPr>
@@ -6289,7 +6246,7 @@
       </p:sp>
       <p:sp>
         <p:nvSpPr>
-          <p:cNvPr id="2054630898" name="TextBox 3"/>
+          <p:cNvPr id="1914133006" name="TextBox 3"/>
           <p:cNvSpPr txBox="1"/>
           <p:nvPr/>
         </p:nvSpPr>
@@ -6332,13 +6289,13 @@
       </p:sp>
       <p:pic>
         <p:nvPicPr>
-          <p:cNvPr id="1894058258" name="Picture 4" descr="A graph of different colored bars&#10;&#10;Description automatically generated"/>
+          <p:cNvPr id="166718011" name="Picture 4" descr="A graph of different colored bars&#10;&#10;Description automatically generated"/>
           <p:cNvPicPr>
             <a:picLocks noChangeAspect="1"/>
           </p:cNvPicPr>
           <p:nvPr/>
         </p:nvPicPr>
-        <p:blipFill>
+        <p:blipFill rotWithShape="1">
           <a:blip r:embed="rId3"/>
           <a:stretch/>
         </p:blipFill>
@@ -6387,7 +6344,7 @@
       </p:grpSpPr>
       <p:sp>
         <p:nvSpPr>
-          <p:cNvPr id="80757715" name="TextBox 3"/>
+          <p:cNvPr id="1051835057" name="TextBox 3"/>
           <p:cNvSpPr txBox="1"/>
           <p:nvPr/>
         </p:nvSpPr>
@@ -6423,7 +6380,7 @@
       </p:sp>
       <p:sp>
         <p:nvSpPr>
-          <p:cNvPr id="1963690643" name="Slide Number Placeholder 1"/>
+          <p:cNvPr id="2029080719" name="Slide Number Placeholder 1"/>
           <p:cNvSpPr>
             <a:spLocks noGrp="1"/>
           </p:cNvSpPr>
@@ -6482,14 +6439,14 @@
       </p:grpSpPr>
       <p:sp>
         <p:nvSpPr>
-          <p:cNvPr id="621925342" name="TextBox 5"/>
+          <p:cNvPr id="1034817111" name="TextBox 5"/>
           <p:cNvSpPr txBox="1"/>
           <p:nvPr/>
         </p:nvSpPr>
         <p:spPr bwMode="auto">
           <a:xfrm>
-            <a:off x="1653655" y="5296142"/>
-            <a:ext cx="8871322" cy="1240433"/>
+            <a:off x="1653654" y="5296141"/>
+            <a:ext cx="8872041" cy="366119"/>
           </a:xfrm>
           <a:prstGeom prst="rect">
             <a:avLst/>
@@ -6508,34 +6465,26 @@
               <a:defRPr/>
             </a:pPr>
             <a:r>
-              <a:rPr lang="en-US">
+              <a:rPr lang="en-US" sz="1800" b="0" i="0" u="none" strike="noStrike" cap="none" spc="0">
+                <a:solidFill>
+                  <a:schemeClr val="tx1"/>
+                </a:solidFill>
+                <a:highlight>
+                  <a:srgbClr val="FFFF00"/>
+                </a:highlight>
                 <a:latin typeface="Arial"/>
+                <a:ea typeface="Arial"/>
                 <a:cs typeface="Arial"/>
               </a:rPr>
-              <a:t>Disconnections after the COVID moratorium ended in Sept 2021 continue to increase. </a:t>
-            </a:r>
-            <a:endParaRPr/>
-          </a:p>
-          <a:p>
-            <a:pPr marL="285750" indent="-285750">
-              <a:buFont typeface="Arial"/>
-              <a:buChar char="•"/>
-              <a:defRPr/>
-            </a:pPr>
-            <a:r>
-              <a:rPr lang="en-US">
-                <a:latin typeface="Arial"/>
-                <a:cs typeface="Arial"/>
-              </a:rPr>
-              <a:t>As PSE gradually decreases its “dunning” threshold from $1000 to $250 through the end of 2024, disconnections may increase further.</a:t>
-            </a:r>
-            <a:endParaRPr/>
-          </a:p>
-        </p:txBody>
-      </p:sp>
-      <p:sp>
-        <p:nvSpPr>
-          <p:cNvPr id="1314293371" name="Slide Number Placeholder 3"/>
+              <a:t>Key findings</a:t>
+            </a:r>
+            <a:endParaRPr/>
+          </a:p>
+        </p:txBody>
+      </p:sp>
+      <p:sp>
+        <p:nvSpPr>
+          <p:cNvPr id="1017720924" name="Slide Number Placeholder 3"/>
           <p:cNvSpPr>
             <a:spLocks noGrp="1"/>
           </p:cNvSpPr>
@@ -6559,28 +6508,6 @@
           </a:p>
         </p:txBody>
       </p:sp>
-      <p:pic>
-        <p:nvPicPr>
-          <p:cNvPr id="1378137317" name="Picture 1" descr="A graph of a number of people&#10;&#10;Description automatically generated"/>
-          <p:cNvPicPr>
-            <a:picLocks noChangeAspect="1"/>
-          </p:cNvPicPr>
-          <p:nvPr/>
-        </p:nvPicPr>
-        <p:blipFill>
-          <a:blip r:embed="rId3"/>
-          <a:stretch/>
-        </p:blipFill>
-        <p:spPr bwMode="auto">
-          <a:xfrm>
-            <a:off x="2306053" y="569805"/>
-            <a:ext cx="7573210" cy="4481812"/>
-          </a:xfrm>
-          <a:prstGeom prst="rect">
-            <a:avLst/>
-          </a:prstGeom>
-        </p:spPr>
-      </p:pic>
     </p:spTree>
   </p:cSld>
   <p:clrMapOvr>
@@ -6616,7 +6543,7 @@
       </p:grpSpPr>
       <p:sp>
         <p:nvSpPr>
-          <p:cNvPr id="1208864836" name="TextBox 3"/>
+          <p:cNvPr id="1208826400" name="TextBox 3"/>
           <p:cNvSpPr txBox="1"/>
           <p:nvPr/>
         </p:nvSpPr>
@@ -6655,7 +6582,7 @@
       </p:sp>
       <p:sp>
         <p:nvSpPr>
-          <p:cNvPr id="381745151" name="Slide Number Placeholder 1"/>
+          <p:cNvPr id="2016864986" name="Slide Number Placeholder 1"/>
           <p:cNvSpPr>
             <a:spLocks noGrp="1"/>
           </p:cNvSpPr>
@@ -6714,7 +6641,7 @@
       </p:grpSpPr>
       <p:sp>
         <p:nvSpPr>
-          <p:cNvPr id="1126884205" name="TextBox 3"/>
+          <p:cNvPr id="181521835" name="TextBox 3"/>
           <p:cNvSpPr txBox="1"/>
           <p:nvPr/>
         </p:nvSpPr>
@@ -6779,7 +6706,7 @@
       </p:sp>
       <p:sp>
         <p:nvSpPr>
-          <p:cNvPr id="1469288126" name="Slide Number Placeholder 4"/>
+          <p:cNvPr id="812074659" name="Slide Number Placeholder 4"/>
           <p:cNvSpPr>
             <a:spLocks noGrp="1"/>
           </p:cNvSpPr>
@@ -6805,13 +6732,13 @@
       </p:sp>
       <p:pic>
         <p:nvPicPr>
-          <p:cNvPr id="1549169814" name="Picture 5" descr="A graph of a number of customers&#10;&#10;Description automatically generated"/>
+          <p:cNvPr id="1387920779" name="Picture 5" descr="A graph of a number of customers&#10;&#10;Description automatically generated"/>
           <p:cNvPicPr>
             <a:picLocks noChangeAspect="1"/>
           </p:cNvPicPr>
           <p:nvPr/>
         </p:nvPicPr>
-        <p:blipFill>
+        <p:blipFill rotWithShape="1">
           <a:blip r:embed="rId3"/>
           <a:stretch/>
         </p:blipFill>
@@ -6827,13 +6754,13 @@
       </p:pic>
       <p:pic>
         <p:nvPicPr>
-          <p:cNvPr id="1866272136" name="Picture 6" descr="A graph of bad debt&#10;&#10;Description automatically generated"/>
+          <p:cNvPr id="114646265" name="Picture 6" descr="A graph of bad debt&#10;&#10;Description automatically generated"/>
           <p:cNvPicPr>
             <a:picLocks noChangeAspect="1"/>
           </p:cNvPicPr>
           <p:nvPr/>
         </p:nvPicPr>
-        <p:blipFill>
+        <p:blipFill rotWithShape="1">
           <a:blip r:embed="rId4"/>
           <a:stretch/>
         </p:blipFill>
@@ -6882,7 +6809,7 @@
       </p:grpSpPr>
       <p:sp>
         <p:nvSpPr>
-          <p:cNvPr id="56084739" name="Slide Number Placeholder 1"/>
+          <p:cNvPr id="2080380800" name="Slide Number Placeholder 1"/>
           <p:cNvSpPr>
             <a:spLocks noGrp="1"/>
           </p:cNvSpPr>
@@ -6908,7 +6835,7 @@
       </p:sp>
       <p:sp>
         <p:nvSpPr>
-          <p:cNvPr id="1602242362" name="TextBox 3"/>
+          <p:cNvPr id="1501512236" name="TextBox 3"/>
           <p:cNvSpPr txBox="1"/>
           <p:nvPr/>
         </p:nvSpPr>
@@ -7062,7 +6989,7 @@
       </p:sp>
       <p:sp>
         <p:nvSpPr>
-          <p:cNvPr id="141238924" name="TextBox 5"/>
+          <p:cNvPr id="77065407" name="TextBox 5"/>
           <p:cNvSpPr txBox="1"/>
           <p:nvPr/>
         </p:nvSpPr>
@@ -7131,7 +7058,7 @@
       </p:grpSpPr>
       <p:sp>
         <p:nvSpPr>
-          <p:cNvPr id="1571030620" name="Title 1"/>
+          <p:cNvPr id="522542654" name="Title 1"/>
           <p:cNvSpPr>
             <a:spLocks noGrp="1"/>
           </p:cNvSpPr>
@@ -7160,7 +7087,7 @@
       </p:sp>
       <p:sp>
         <p:nvSpPr>
-          <p:cNvPr id="737409359" name="Content Placeholder 2"/>
+          <p:cNvPr id="1673352033" name="Content Placeholder 2"/>
           <p:cNvSpPr>
             <a:spLocks noGrp="1"/>
           </p:cNvSpPr>
@@ -7384,7 +7311,7 @@
       </p:sp>
       <p:sp>
         <p:nvSpPr>
-          <p:cNvPr id="1328227270" name="Slide Number Placeholder 3"/>
+          <p:cNvPr id="669489212" name="Slide Number Placeholder 3"/>
           <p:cNvSpPr>
             <a:spLocks noGrp="1"/>
           </p:cNvSpPr>
@@ -7443,7 +7370,7 @@
       </p:grpSpPr>
       <p:sp>
         <p:nvSpPr>
-          <p:cNvPr id="1924584654" name="TextBox 3"/>
+          <p:cNvPr id="1106750681" name="TextBox 3"/>
           <p:cNvSpPr txBox="1"/>
           <p:nvPr/>
         </p:nvSpPr>
@@ -7479,7 +7406,7 @@
       </p:sp>
       <p:sp>
         <p:nvSpPr>
-          <p:cNvPr id="1210308161" name="Slide Number Placeholder 1"/>
+          <p:cNvPr id="1832473476" name="Slide Number Placeholder 1"/>
           <p:cNvSpPr>
             <a:spLocks noGrp="1"/>
           </p:cNvSpPr>
@@ -7538,7 +7465,7 @@
       </p:grpSpPr>
       <p:sp>
         <p:nvSpPr>
-          <p:cNvPr id="1995566841" name="Slide Number Placeholder 1"/>
+          <p:cNvPr id="1060709809" name="Slide Number Placeholder 1"/>
           <p:cNvSpPr>
             <a:spLocks noGrp="1"/>
           </p:cNvSpPr>
@@ -7564,7 +7491,7 @@
       </p:sp>
       <p:sp>
         <p:nvSpPr>
-          <p:cNvPr id="229268071" name="TextBox 4"/>
+          <p:cNvPr id="631526065" name="TextBox 4"/>
           <p:cNvSpPr txBox="1"/>
           <p:nvPr/>
         </p:nvSpPr>
@@ -8445,7 +8372,7 @@
       </p:grpSpPr>
       <p:sp>
         <p:nvSpPr>
-          <p:cNvPr id="1569884430" name="Slide Number Placeholder 1"/>
+          <p:cNvPr id="80135849" name="Slide Number Placeholder 1"/>
           <p:cNvSpPr>
             <a:spLocks noGrp="1"/>
           </p:cNvSpPr>
@@ -8471,7 +8398,7 @@
       </p:sp>
       <p:sp>
         <p:nvSpPr>
-          <p:cNvPr id="128982866" name="TextBox 4"/>
+          <p:cNvPr id="55133568" name="TextBox 4"/>
           <p:cNvSpPr txBox="1"/>
           <p:nvPr/>
         </p:nvSpPr>
@@ -8684,7 +8611,7 @@
       </p:grpSpPr>
       <p:sp>
         <p:nvSpPr>
-          <p:cNvPr id="801548256" name="Title 1"/>
+          <p:cNvPr id="504640178" name="Title 1"/>
           <p:cNvSpPr>
             <a:spLocks noGrp="1"/>
           </p:cNvSpPr>
@@ -8718,7 +8645,7 @@
       </p:sp>
       <p:sp>
         <p:nvSpPr>
-          <p:cNvPr id="251432923" name="Content Placeholder 2"/>
+          <p:cNvPr id="27750690" name="Content Placeholder 2"/>
           <p:cNvSpPr>
             <a:spLocks noGrp="1"/>
           </p:cNvSpPr>
@@ -8747,7 +8674,7 @@
       </p:sp>
       <p:sp>
         <p:nvSpPr>
-          <p:cNvPr id="471000163" name="Slide Number Placeholder 3"/>
+          <p:cNvPr id="266457505" name="Slide Number Placeholder 3"/>
           <p:cNvSpPr>
             <a:spLocks noGrp="1"/>
           </p:cNvSpPr>
@@ -8806,7 +8733,7 @@
       </p:grpSpPr>
       <p:sp>
         <p:nvSpPr>
-          <p:cNvPr id="1237292380" name="TextBox 3"/>
+          <p:cNvPr id="1848639830" name="TextBox 3"/>
           <p:cNvSpPr txBox="1"/>
           <p:nvPr/>
         </p:nvSpPr>
@@ -8842,7 +8769,7 @@
       </p:sp>
       <p:sp>
         <p:nvSpPr>
-          <p:cNvPr id="704301583" name="Slide Number Placeholder 1"/>
+          <p:cNvPr id="1536927453" name="Slide Number Placeholder 1"/>
           <p:cNvSpPr>
             <a:spLocks noGrp="1"/>
           </p:cNvSpPr>
@@ -8901,7 +8828,7 @@
       </p:grpSpPr>
       <p:sp>
         <p:nvSpPr>
-          <p:cNvPr id="1073100270" name="TextBox 5"/>
+          <p:cNvPr id="1579870042" name="TextBox 5"/>
           <p:cNvSpPr txBox="1"/>
           <p:nvPr/>
         </p:nvSpPr>
@@ -8943,7 +8870,7 @@
       </p:sp>
       <p:sp>
         <p:nvSpPr>
-          <p:cNvPr id="642556273" name="Slide Number Placeholder 3"/>
+          <p:cNvPr id="852939849" name="Slide Number Placeholder 3"/>
           <p:cNvSpPr>
             <a:spLocks noGrp="1"/>
           </p:cNvSpPr>
@@ -9002,13 +8929,13 @@
       </p:grpSpPr>
       <p:pic>
         <p:nvPicPr>
-          <p:cNvPr id="652655657" name="Picture 6" descr="A table with numbers and symbols&#10;&#10;Description automatically generated"/>
+          <p:cNvPr id="1079714843" name="Picture 6" descr="A table with numbers and symbols&#10;&#10;Description automatically generated"/>
           <p:cNvPicPr>
             <a:picLocks noChangeAspect="1"/>
           </p:cNvPicPr>
           <p:nvPr/>
         </p:nvPicPr>
-        <p:blipFill>
+        <p:blipFill rotWithShape="1">
           <a:blip r:embed="rId3"/>
           <a:stretch/>
         </p:blipFill>
@@ -9029,13 +8956,13 @@
       </p:pic>
       <p:pic>
         <p:nvPicPr>
-          <p:cNvPr id="168885017" name="Picture 8"/>
+          <p:cNvPr id="983545330" name="Picture 8"/>
           <p:cNvPicPr>
             <a:picLocks noChangeAspect="1"/>
           </p:cNvPicPr>
           <p:nvPr/>
         </p:nvPicPr>
-        <p:blipFill>
+        <p:blipFill rotWithShape="1">
           <a:blip r:embed="rId4"/>
           <a:stretch/>
         </p:blipFill>
@@ -9056,7 +8983,7 @@
       </p:pic>
       <p:sp>
         <p:nvSpPr>
-          <p:cNvPr id="348702396" name="TextBox 9"/>
+          <p:cNvPr id="1147851227" name="TextBox 9"/>
           <p:cNvSpPr txBox="1"/>
           <p:nvPr/>
         </p:nvSpPr>
@@ -9107,7 +9034,7 @@
       </p:sp>
       <p:sp>
         <p:nvSpPr>
-          <p:cNvPr id="695177626" name="Slide Number Placeholder 3"/>
+          <p:cNvPr id="1385943234" name="Slide Number Placeholder 3"/>
           <p:cNvSpPr>
             <a:spLocks noGrp="1"/>
           </p:cNvSpPr>
@@ -9166,7 +9093,7 @@
       </p:grpSpPr>
       <p:sp>
         <p:nvSpPr>
-          <p:cNvPr id="357445344" name="Slide Number Placeholder 1"/>
+          <p:cNvPr id="1341687029" name="Slide Number Placeholder 1"/>
           <p:cNvSpPr>
             <a:spLocks noGrp="1"/>
           </p:cNvSpPr>
@@ -9192,7 +9119,7 @@
       </p:sp>
       <p:sp>
         <p:nvSpPr>
-          <p:cNvPr id="2082306951" name="TextBox 3"/>
+          <p:cNvPr id="406385520" name="TextBox 3"/>
           <p:cNvSpPr txBox="1"/>
           <p:nvPr/>
         </p:nvSpPr>
@@ -9267,7 +9194,7 @@
       </p:grpSpPr>
       <p:sp>
         <p:nvSpPr>
-          <p:cNvPr id="1837021906" name="TextBox 3"/>
+          <p:cNvPr id="1888764418" name="TextBox 3"/>
           <p:cNvSpPr txBox="1"/>
           <p:nvPr/>
         </p:nvSpPr>
@@ -9308,7 +9235,7 @@
       </p:sp>
       <p:sp>
         <p:nvSpPr>
-          <p:cNvPr id="664165301" name="Slide Number Placeholder 4"/>
+          <p:cNvPr id="315507266" name="Slide Number Placeholder 4"/>
           <p:cNvSpPr>
             <a:spLocks noGrp="1"/>
           </p:cNvSpPr>
@@ -9367,7 +9294,7 @@
       </p:grpSpPr>
       <p:sp>
         <p:nvSpPr>
-          <p:cNvPr id="950161098" name="TextBox 3"/>
+          <p:cNvPr id="1652365229" name="TextBox 3"/>
           <p:cNvSpPr txBox="1"/>
           <p:nvPr/>
         </p:nvSpPr>
@@ -9403,7 +9330,7 @@
       </p:sp>
       <p:sp>
         <p:nvSpPr>
-          <p:cNvPr id="1800995089" name="Slide Number Placeholder 1"/>
+          <p:cNvPr id="70037721" name="Slide Number Placeholder 1"/>
           <p:cNvSpPr>
             <a:spLocks noGrp="1"/>
           </p:cNvSpPr>
@@ -9831,317 +9758,4 @@
   </a:themeElements>
   <a:objectDefaults/>
 </a:theme>
-</file>
-
-<file path=customXml/item1.xml><?xml version="1.0" encoding="utf-8"?>
-<?mso-contentType ?>
-<FormTemplates xmlns="http://schemas.microsoft.com/sharepoint/v3/contenttype/forms">
-  <Display>DocumentLibraryForm</Display>
-  <Edit>DocumentLibraryForm</Edit>
-  <New>DocumentLibraryForm</New>
-</FormTemplates>
-</file>
-
-<file path=customXml/item2.xml><?xml version="1.0" encoding="utf-8"?>
-<ct:contentTypeSchema xmlns:ct="http://schemas.microsoft.com/office/2006/metadata/contentType" xmlns:ma="http://schemas.microsoft.com/office/2006/metadata/properties/metaAttributes" ct:_="" ma:_="" ma:contentTypeName="Document" ma:contentTypeID="0x01010000192DA4D3C2484DBD3CB2E79260946C" ma:contentTypeVersion="18" ma:contentTypeDescription="Create a new document." ma:contentTypeScope="" ma:versionID="17646dce01e37e40141dbcdeb83a4b08">
-  <xsd:schema xmlns:xsd="http://www.w3.org/2001/XMLSchema" xmlns:xs="http://www.w3.org/2001/XMLSchema" xmlns:p="http://schemas.microsoft.com/office/2006/metadata/properties" xmlns:ns2="c63243ee-7a43-49e5-874f-b659d1b6ac9c" xmlns:ns3="69391a83-cbd8-4275-8307-dbbd84db8cb9" targetNamespace="http://schemas.microsoft.com/office/2006/metadata/properties" ma:root="true" ma:fieldsID="1cd51002fb7b82911b2ecf16b2f1e36c" ns2:_="" ns3:_="">
-    <xsd:import namespace="c63243ee-7a43-49e5-874f-b659d1b6ac9c"/>
-    <xsd:import namespace="69391a83-cbd8-4275-8307-dbbd84db8cb9"/>
-    <xsd:element name="properties">
-      <xsd:complexType>
-        <xsd:sequence>
-          <xsd:element name="documentManagement">
-            <xsd:complexType>
-              <xsd:all>
-                <xsd:element ref="ns2:MediaServiceMetadata" minOccurs="0"/>
-                <xsd:element ref="ns2:MediaServiceFastMetadata" minOccurs="0"/>
-                <xsd:element ref="ns3:SharedWithUsers" minOccurs="0"/>
-                <xsd:element ref="ns3:SharedWithDetails" minOccurs="0"/>
-                <xsd:element ref="ns2:MediaServiceAutoTags" minOccurs="0"/>
-                <xsd:element ref="ns2:MediaServiceOCR" minOccurs="0"/>
-                <xsd:element ref="ns2:MediaServiceDateTaken" minOccurs="0"/>
-                <xsd:element ref="ns2:MediaServiceGenerationTime" minOccurs="0"/>
-                <xsd:element ref="ns2:MediaServiceEventHashCode" minOccurs="0"/>
-                <xsd:element ref="ns2:MediaServiceLocation" minOccurs="0"/>
-                <xsd:element ref="ns2:MediaServiceAutoKeyPoints" minOccurs="0"/>
-                <xsd:element ref="ns2:MediaServiceKeyPoints" minOccurs="0"/>
-                <xsd:element ref="ns2:MediaLengthInSeconds" minOccurs="0"/>
-                <xsd:element ref="ns2:lcf76f155ced4ddcb4097134ff3c332f" minOccurs="0"/>
-                <xsd:element ref="ns3:TaxCatchAll" minOccurs="0"/>
-                <xsd:element ref="ns2:MediaServiceObjectDetectorVersions" minOccurs="0"/>
-                <xsd:element ref="ns2:MediaServiceSearchProperties" minOccurs="0"/>
-              </xsd:all>
-            </xsd:complexType>
-          </xsd:element>
-        </xsd:sequence>
-      </xsd:complexType>
-    </xsd:element>
-  </xsd:schema>
-  <xsd:schema xmlns:xsd="http://www.w3.org/2001/XMLSchema" xmlns:xs="http://www.w3.org/2001/XMLSchema" xmlns:dms="http://schemas.microsoft.com/office/2006/documentManagement/types" xmlns:pc="http://schemas.microsoft.com/office/infopath/2007/PartnerControls" targetNamespace="c63243ee-7a43-49e5-874f-b659d1b6ac9c" elementFormDefault="qualified">
-    <xsd:import namespace="http://schemas.microsoft.com/office/2006/documentManagement/types"/>
-    <xsd:import namespace="http://schemas.microsoft.com/office/infopath/2007/PartnerControls"/>
-    <xsd:element name="MediaServiceMetadata" ma:index="8" nillable="true" ma:displayName="MediaServiceMetadata" ma:hidden="true" ma:internalName="MediaServiceMetadata" ma:readOnly="true">
-      <xsd:simpleType>
-        <xsd:restriction base="dms:Note"/>
-      </xsd:simpleType>
-    </xsd:element>
-    <xsd:element name="MediaServiceFastMetadata" ma:index="9" nillable="true" ma:displayName="MediaServiceFastMetadata" ma:hidden="true" ma:internalName="MediaServiceFastMetadata" ma:readOnly="true">
-      <xsd:simpleType>
-        <xsd:restriction base="dms:Note"/>
-      </xsd:simpleType>
-    </xsd:element>
-    <xsd:element name="MediaServiceAutoTags" ma:index="12" nillable="true" ma:displayName="Tags" ma:internalName="MediaServiceAutoTags" ma:readOnly="true">
-      <xsd:simpleType>
-        <xsd:restriction base="dms:Text"/>
-      </xsd:simpleType>
-    </xsd:element>
-    <xsd:element name="MediaServiceOCR" ma:index="13" nillable="true" ma:displayName="Extracted Text" ma:internalName="MediaServiceOCR" ma:readOnly="true">
-      <xsd:simpleType>
-        <xsd:restriction base="dms:Note">
-          <xsd:maxLength value="255"/>
-        </xsd:restriction>
-      </xsd:simpleType>
-    </xsd:element>
-    <xsd:element name="MediaServiceDateTaken" ma:index="14" nillable="true" ma:displayName="MediaServiceDateTaken" ma:hidden="true" ma:internalName="MediaServiceDateTaken" ma:readOnly="true">
-      <xsd:simpleType>
-        <xsd:restriction base="dms:Text"/>
-      </xsd:simpleType>
-    </xsd:element>
-    <xsd:element name="MediaServiceGenerationTime" ma:index="15" nillable="true" ma:displayName="MediaServiceGenerationTime" ma:hidden="true" ma:internalName="MediaServiceGenerationTime" ma:readOnly="true">
-      <xsd:simpleType>
-        <xsd:restriction base="dms:Text"/>
-      </xsd:simpleType>
-    </xsd:element>
-    <xsd:element name="MediaServiceEventHashCode" ma:index="16" nillable="true" ma:displayName="MediaServiceEventHashCode" ma:hidden="true" ma:internalName="MediaServiceEventHashCode" ma:readOnly="true">
-      <xsd:simpleType>
-        <xsd:restriction base="dms:Text"/>
-      </xsd:simpleType>
-    </xsd:element>
-    <xsd:element name="MediaServiceLocation" ma:index="17" nillable="true" ma:displayName="Location" ma:internalName="MediaServiceLocation" ma:readOnly="true">
-      <xsd:simpleType>
-        <xsd:restriction base="dms:Text"/>
-      </xsd:simpleType>
-    </xsd:element>
-    <xsd:element name="MediaServiceAutoKeyPoints" ma:index="18" nillable="true" ma:displayName="MediaServiceAutoKeyPoints" ma:hidden="true" ma:internalName="MediaServiceAutoKeyPoints" ma:readOnly="true">
-      <xsd:simpleType>
-        <xsd:restriction base="dms:Note"/>
-      </xsd:simpleType>
-    </xsd:element>
-    <xsd:element name="MediaServiceKeyPoints" ma:index="19" nillable="true" ma:displayName="KeyPoints" ma:internalName="MediaServiceKeyPoints" ma:readOnly="true">
-      <xsd:simpleType>
-        <xsd:restriction base="dms:Note">
-          <xsd:maxLength value="255"/>
-        </xsd:restriction>
-      </xsd:simpleType>
-    </xsd:element>
-    <xsd:element name="MediaLengthInSeconds" ma:index="20" nillable="true" ma:displayName="Length (seconds)" ma:internalName="MediaLengthInSeconds" ma:readOnly="true">
-      <xsd:simpleType>
-        <xsd:restriction base="dms:Unknown"/>
-      </xsd:simpleType>
-    </xsd:element>
-    <xsd:element name="lcf76f155ced4ddcb4097134ff3c332f" ma:index="22" nillable="true" ma:taxonomy="true" ma:internalName="lcf76f155ced4ddcb4097134ff3c332f" ma:taxonomyFieldName="MediaServiceImageTags" ma:displayName="Image Tags" ma:readOnly="false" ma:fieldId="{5cf76f15-5ced-4ddc-b409-7134ff3c332f}" ma:taxonomyMulti="true" ma:sspId="e37ab07d-ee48-4013-9603-76112fe1db5f" ma:termSetId="09814cd3-568e-fe90-9814-8d621ff8fb84" ma:anchorId="fba54fb3-c3e1-fe81-a776-ca4b69148c4d" ma:open="true" ma:isKeyword="false">
-      <xsd:complexType>
-        <xsd:sequence>
-          <xsd:element ref="pc:Terms" minOccurs="0" maxOccurs="1"/>
-        </xsd:sequence>
-      </xsd:complexType>
-    </xsd:element>
-    <xsd:element name="MediaServiceObjectDetectorVersions" ma:index="24" nillable="true" ma:displayName="MediaServiceObjectDetectorVersions" ma:hidden="true" ma:indexed="true" ma:internalName="MediaServiceObjectDetectorVersions" ma:readOnly="true">
-      <xsd:simpleType>
-        <xsd:restriction base="dms:Text"/>
-      </xsd:simpleType>
-    </xsd:element>
-    <xsd:element name="MediaServiceSearchProperties" ma:index="25" nillable="true" ma:displayName="MediaServiceSearchProperties" ma:hidden="true" ma:internalName="MediaServiceSearchProperties" ma:readOnly="true">
-      <xsd:simpleType>
-        <xsd:restriction base="dms:Note"/>
-      </xsd:simpleType>
-    </xsd:element>
-  </xsd:schema>
-  <xsd:schema xmlns:xsd="http://www.w3.org/2001/XMLSchema" xmlns:xs="http://www.w3.org/2001/XMLSchema" xmlns:dms="http://schemas.microsoft.com/office/2006/documentManagement/types" xmlns:pc="http://schemas.microsoft.com/office/infopath/2007/PartnerControls" targetNamespace="69391a83-cbd8-4275-8307-dbbd84db8cb9" elementFormDefault="qualified">
-    <xsd:import namespace="http://schemas.microsoft.com/office/2006/documentManagement/types"/>
-    <xsd:import namespace="http://schemas.microsoft.com/office/infopath/2007/PartnerControls"/>
-    <xsd:element name="SharedWithUsers" ma:index="10" nillable="true" ma:displayName="Shared With" ma:internalName="SharedWithUsers" ma:readOnly="true">
-      <xsd:complexType>
-        <xsd:complexContent>
-          <xsd:extension base="dms:UserMulti">
-            <xsd:sequence>
-              <xsd:element name="UserInfo" minOccurs="0" maxOccurs="unbounded">
-                <xsd:complexType>
-                  <xsd:sequence>
-                    <xsd:element name="DisplayName" type="xsd:string" minOccurs="0"/>
-                    <xsd:element name="AccountId" type="dms:UserId" minOccurs="0" nillable="true"/>
-                    <xsd:element name="AccountType" type="xsd:string" minOccurs="0"/>
-                  </xsd:sequence>
-                </xsd:complexType>
-              </xsd:element>
-            </xsd:sequence>
-          </xsd:extension>
-        </xsd:complexContent>
-      </xsd:complexType>
-    </xsd:element>
-    <xsd:element name="SharedWithDetails" ma:index="11" nillable="true" ma:displayName="Shared With Details" ma:internalName="SharedWithDetails" ma:readOnly="true">
-      <xsd:simpleType>
-        <xsd:restriction base="dms:Note">
-          <xsd:maxLength value="255"/>
-        </xsd:restriction>
-      </xsd:simpleType>
-    </xsd:element>
-    <xsd:element name="TaxCatchAll" ma:index="23" nillable="true" ma:displayName="Taxonomy Catch All Column" ma:hidden="true" ma:list="{22d71218-25f3-483b-9fab-e82a30a4cc14}" ma:internalName="TaxCatchAll" ma:showField="CatchAllData" ma:web="69391a83-cbd8-4275-8307-dbbd84db8cb9">
-      <xsd:complexType>
-        <xsd:complexContent>
-          <xsd:extension base="dms:MultiChoiceLookup">
-            <xsd:sequence>
-              <xsd:element name="Value" type="dms:Lookup" maxOccurs="unbounded" minOccurs="0" nillable="true"/>
-            </xsd:sequence>
-          </xsd:extension>
-        </xsd:complexContent>
-      </xsd:complexType>
-    </xsd:element>
-  </xsd:schema>
-  <xsd:schema xmlns="http://schemas.openxmlformats.org/package/2006/metadata/core-properties" xmlns:xsd="http://www.w3.org/2001/XMLSchema" xmlns:xsi="http://www.w3.org/2001/XMLSchema-instance" xmlns:dc="http://purl.org/dc/elements/1.1/" xmlns:dcterms="http://purl.org/dc/terms/" xmlns:odoc="http://schemas.microsoft.com/internal/obd" targetNamespace="http://schemas.openxmlformats.org/package/2006/metadata/core-properties" elementFormDefault="qualified" attributeFormDefault="unqualified" blockDefault="#all">
-    <xsd:import namespace="http://purl.org/dc/elements/1.1/" schemaLocation="http://dublincore.org/schemas/xmls/qdc/2003/04/02/dc.xsd"/>
-    <xsd:import namespace="http://purl.org/dc/terms/" schemaLocation="http://dublincore.org/schemas/xmls/qdc/2003/04/02/dcterms.xsd"/>
-    <xsd:element name="coreProperties" type="CT_coreProperties"/>
-    <xsd:complexType name="CT_coreProperties">
-      <xsd:all>
-        <xsd:element ref="dc:creator" minOccurs="0" maxOccurs="1"/>
-        <xsd:element ref="dcterms:created" minOccurs="0" maxOccurs="1"/>
-        <xsd:element ref="dc:identifier" minOccurs="0" maxOccurs="1"/>
-        <xsd:element name="contentType" minOccurs="0" maxOccurs="1" type="xsd:string" ma:index="0" ma:displayName="Content Type"/>
-        <xsd:element ref="dc:title" minOccurs="0" maxOccurs="1" ma:index="4" ma:displayName="Title"/>
-        <xsd:element ref="dc:subject" minOccurs="0" maxOccurs="1"/>
-        <xsd:element ref="dc:description" minOccurs="0" maxOccurs="1"/>
-        <xsd:element name="keywords" minOccurs="0" maxOccurs="1" type="xsd:string"/>
-        <xsd:element ref="dc:language" minOccurs="0" maxOccurs="1"/>
-        <xsd:element name="category" minOccurs="0" maxOccurs="1" type="xsd:string"/>
-        <xsd:element name="version" minOccurs="0" maxOccurs="1" type="xsd:string"/>
-        <xsd:element name="revision" minOccurs="0" maxOccurs="1" type="xsd:string">
-          <xsd:annotation>
-            <xsd:documentation>This value indicates the number of saves or revisions. The application is responsible for updating this value after each revision.</xsd:documentation>
-          </xsd:annotation>
-        </xsd:element>
-        <xsd:element name="lastModifiedBy" minOccurs="0" maxOccurs="1" type="xsd:string"/>
-        <xsd:element ref="dcterms:modified" minOccurs="0" maxOccurs="1"/>
-        <xsd:element name="contentStatus" minOccurs="0" maxOccurs="1" type="xsd:string"/>
-      </xsd:all>
-    </xsd:complexType>
-  </xsd:schema>
-  <xs:schema xmlns:pc="http://schemas.microsoft.com/office/infopath/2007/PartnerControls" xmlns:xs="http://www.w3.org/2001/XMLSchema" targetNamespace="http://schemas.microsoft.com/office/infopath/2007/PartnerControls" elementFormDefault="qualified" attributeFormDefault="unqualified">
-    <xs:element name="Person">
-      <xs:complexType>
-        <xs:sequence>
-          <xs:element ref="pc:DisplayName" minOccurs="0"/>
-          <xs:element ref="pc:AccountId" minOccurs="0"/>
-          <xs:element ref="pc:AccountType" minOccurs="0"/>
-        </xs:sequence>
-      </xs:complexType>
-    </xs:element>
-    <xs:element name="DisplayName" type="xs:string"/>
-    <xs:element name="AccountId" type="xs:string"/>
-    <xs:element name="AccountType" type="xs:string"/>
-    <xs:element name="BDCAssociatedEntity">
-      <xs:complexType>
-        <xs:sequence>
-          <xs:element ref="pc:BDCEntity" minOccurs="0" maxOccurs="unbounded"/>
-        </xs:sequence>
-        <xs:attribute ref="pc:EntityNamespace"/>
-        <xs:attribute ref="pc:EntityName"/>
-        <xs:attribute ref="pc:SystemInstanceName"/>
-        <xs:attribute ref="pc:AssociationName"/>
-      </xs:complexType>
-    </xs:element>
-    <xs:attribute name="EntityNamespace" type="xs:string"/>
-    <xs:attribute name="EntityName" type="xs:string"/>
-    <xs:attribute name="SystemInstanceName" type="xs:string"/>
-    <xs:attribute name="AssociationName" type="xs:string"/>
-    <xs:element name="BDCEntity">
-      <xs:complexType>
-        <xs:sequence>
-          <xs:element ref="pc:EntityDisplayName" minOccurs="0"/>
-          <xs:element ref="pc:EntityInstanceReference" minOccurs="0"/>
-          <xs:element ref="pc:EntityId1" minOccurs="0"/>
-          <xs:element ref="pc:EntityId2" minOccurs="0"/>
-          <xs:element ref="pc:EntityId3" minOccurs="0"/>
-          <xs:element ref="pc:EntityId4" minOccurs="0"/>
-          <xs:element ref="pc:EntityId5" minOccurs="0"/>
-        </xs:sequence>
-      </xs:complexType>
-    </xs:element>
-    <xs:element name="EntityDisplayName" type="xs:string"/>
-    <xs:element name="EntityInstanceReference" type="xs:string"/>
-    <xs:element name="EntityId1" type="xs:string"/>
-    <xs:element name="EntityId2" type="xs:string"/>
-    <xs:element name="EntityId3" type="xs:string"/>
-    <xs:element name="EntityId4" type="xs:string"/>
-    <xs:element name="EntityId5" type="xs:string"/>
-    <xs:element name="Terms">
-      <xs:complexType>
-        <xs:sequence>
-          <xs:element ref="pc:TermInfo" minOccurs="0" maxOccurs="unbounded"/>
-        </xs:sequence>
-      </xs:complexType>
-    </xs:element>
-    <xs:element name="TermInfo">
-      <xs:complexType>
-        <xs:sequence>
-          <xs:element ref="pc:TermName" minOccurs="0"/>
-          <xs:element ref="pc:TermId" minOccurs="0"/>
-        </xs:sequence>
-      </xs:complexType>
-    </xs:element>
-    <xs:element name="TermName" type="xs:string"/>
-    <xs:element name="TermId" type="xs:string"/>
-  </xs:schema>
-</ct:contentTypeSchema>
-</file>
-
-<file path=customXml/item3.xml><?xml version="1.0" encoding="utf-8"?>
-<p:properties xmlns:p="http://schemas.microsoft.com/office/2006/metadata/properties" xmlns:xsi="http://www.w3.org/2001/XMLSchema-instance" xmlns:pc="http://schemas.microsoft.com/office/infopath/2007/PartnerControls">
-  <documentManagement>
-    <lcf76f155ced4ddcb4097134ff3c332f xmlns="c63243ee-7a43-49e5-874f-b659d1b6ac9c">
-      <Terms xmlns="http://schemas.microsoft.com/office/infopath/2007/PartnerControls"/>
-    </lcf76f155ced4ddcb4097134ff3c332f>
-    <TaxCatchAll xmlns="69391a83-cbd8-4275-8307-dbbd84db8cb9" xsi:nil="true"/>
-  </documentManagement>
-</p:properties>
-</file>
-
-<file path=customXml/itemProps1.xml><?xml version="1.0" encoding="utf-8"?>
-<ds:datastoreItem xmlns:ds="http://schemas.openxmlformats.org/officeDocument/2006/customXml" ds:itemID="{7D0419D8-5A74-4BE1-BB85-D25074801D49}">
-  <ds:schemaRefs>
-    <ds:schemaRef ds:uri="http://schemas.microsoft.com/sharepoint/v3/contenttype/forms"/>
-  </ds:schemaRefs>
-</ds:datastoreItem>
-</file>
-
-<file path=customXml/itemProps2.xml><?xml version="1.0" encoding="utf-8"?>
-<ds:datastoreItem xmlns:ds="http://schemas.openxmlformats.org/officeDocument/2006/customXml" ds:itemID="{F93CD1AE-53A8-460F-828A-58E737BB1D58}">
-  <ds:schemaRefs>
-    <ds:schemaRef ds:uri="69391a83-cbd8-4275-8307-dbbd84db8cb9"/>
-    <ds:schemaRef ds:uri="c63243ee-7a43-49e5-874f-b659d1b6ac9c"/>
-    <ds:schemaRef ds:uri="http://purl.org/dc/elements/1.1/"/>
-    <ds:schemaRef ds:uri="http://purl.org/dc/terms/"/>
-    <ds:schemaRef ds:uri="http://schemas.microsoft.com/internal/obd"/>
-    <ds:schemaRef ds:uri="http://schemas.microsoft.com/office/2006/documentManagement/types"/>
-    <ds:schemaRef ds:uri="http://schemas.microsoft.com/office/2006/metadata/contentType"/>
-    <ds:schemaRef ds:uri="http://schemas.microsoft.com/office/2006/metadata/properties"/>
-    <ds:schemaRef ds:uri="http://schemas.microsoft.com/office/2006/metadata/properties/metaAttributes"/>
-    <ds:schemaRef ds:uri="http://schemas.microsoft.com/office/infopath/2007/PartnerControls"/>
-    <ds:schemaRef ds:uri="http://schemas.openxmlformats.org/package/2006/metadata/core-properties"/>
-    <ds:schemaRef ds:uri="http://www.w3.org/2001/XMLSchema"/>
-    <ds:schemaRef ds:uri="http://www.w3.org/2001/XMLSchema-instance"/>
-  </ds:schemaRefs>
-</ds:datastoreItem>
-</file>
-
-<file path=customXml/itemProps3.xml><?xml version="1.0" encoding="utf-8"?>
-<ds:datastoreItem xmlns:ds="http://schemas.openxmlformats.org/officeDocument/2006/customXml" ds:itemID="{D650C90B-535D-4DA4-986A-B82D2C148D5D}">
-  <ds:schemaRefs>
-    <ds:schemaRef ds:uri="69391a83-cbd8-4275-8307-dbbd84db8cb9"/>
-    <ds:schemaRef ds:uri="c63243ee-7a43-49e5-874f-b659d1b6ac9c"/>
-    <ds:schemaRef ds:uri="http://schemas.microsoft.com/office/2006/metadata/properties"/>
-    <ds:schemaRef ds:uri="http://schemas.microsoft.com/office/infopath/2007/PartnerControls"/>
-    <ds:schemaRef ds:uri="http://www.w3.org/2001/XMLSchema-instance"/>
-  </ds:schemaRefs>
-</ds:datastoreItem>
 </file>